--- a/assets/presentations/diaporamas/P2-ce-que-la-direction-decide.pptx
+++ b/assets/presentations/diaporamas/P2-ce-que-la-direction-decide.pptx
@@ -1001,7 +1001,7 @@
           <a:lstStyle/>
           <a:p>
             <a:r>
-              <a:t>Ne pas vendre le mode sans IA comme équivalent. Dire le coût : le travail de correction revient à l'enseignant.</a:t>
+              <a:t>Ne pas vendre le mode sans assistance comme équivalent. Dire le coût : le travail de correction revient à l'enseignant.</a:t>
             </a:r>
           </a:p>
         </p:txBody>

--- a/assets/presentations/diaporamas/P2-ce-que-la-direction-decide.pptx
+++ b/assets/presentations/diaporamas/P2-ce-que-la-direction-decide.pptx
@@ -8468,7 +8468,7 @@
         <p:spPr>
           <a:xfrm>
             <a:off x="886968" y="2084831"/>
-            <a:ext cx="4806543" cy="656843"/>
+            <a:ext cx="4806543" cy="387096"/>
           </a:xfrm>
           <a:prstGeom prst="rect">
             <a:avLst/>
@@ -8487,7 +8487,7 @@
               </a:lnSpc>
             </a:pPr>
             <a:r>
-              <a:rPr sz="2100" b="1" i="0">
+              <a:rPr sz="2400" b="1" i="0">
                 <a:solidFill>
                   <a:srgbClr val="1D6B8F"/>
                 </a:solidFill>
@@ -8506,8 +8506,8 @@
         </p:nvSpPr>
         <p:spPr>
           <a:xfrm>
-            <a:off x="886968" y="2769108"/>
-            <a:ext cx="4806543" cy="819912"/>
+            <a:off x="886968" y="2499360"/>
+            <a:ext cx="4806543" cy="1089660"/>
           </a:xfrm>
           <a:prstGeom prst="rect">
             <a:avLst/>
@@ -8592,7 +8592,7 @@
         <p:spPr>
           <a:xfrm>
             <a:off x="6498183" y="2084831"/>
-            <a:ext cx="4806543" cy="656843"/>
+            <a:ext cx="4806543" cy="387096"/>
           </a:xfrm>
           <a:prstGeom prst="rect">
             <a:avLst/>
@@ -8611,7 +8611,7 @@
               </a:lnSpc>
             </a:pPr>
             <a:r>
-              <a:rPr sz="2100" b="1" i="0">
+              <a:rPr sz="2400" b="1" i="0">
                 <a:solidFill>
                   <a:srgbClr val="1D6B8F"/>
                 </a:solidFill>
@@ -8630,8 +8630,8 @@
         </p:nvSpPr>
         <p:spPr>
           <a:xfrm>
-            <a:off x="6498183" y="2769108"/>
-            <a:ext cx="4806543" cy="819912"/>
+            <a:off x="6498183" y="2499360"/>
+            <a:ext cx="4806543" cy="1089660"/>
           </a:xfrm>
           <a:prstGeom prst="rect">
             <a:avLst/>
@@ -8716,7 +8716,7 @@
         <p:spPr>
           <a:xfrm>
             <a:off x="886968" y="4302252"/>
-            <a:ext cx="4806543" cy="656843"/>
+            <a:ext cx="4806543" cy="387096"/>
           </a:xfrm>
           <a:prstGeom prst="rect">
             <a:avLst/>
@@ -8735,13 +8735,13 @@
               </a:lnSpc>
             </a:pPr>
             <a:r>
-              <a:rPr sz="2100" b="1" i="0">
+              <a:rPr sz="2400" b="1" i="0">
                 <a:solidFill>
                   <a:srgbClr val="1D6B8F"/>
                 </a:solidFill>
                 <a:latin typeface="Verdana"/>
               </a:rPr>
-              <a:t>Ce qui change pour l'élève</a:t>
+              <a:t>Pour l'élève</a:t>
             </a:r>
           </a:p>
         </p:txBody>
@@ -8754,8 +8754,8 @@
         </p:nvSpPr>
         <p:spPr>
           <a:xfrm>
-            <a:off x="886968" y="4986528"/>
-            <a:ext cx="4806543" cy="819912"/>
+            <a:off x="886968" y="4716780"/>
+            <a:ext cx="4806543" cy="1089660"/>
           </a:xfrm>
           <a:prstGeom prst="rect">
             <a:avLst/>
@@ -8840,7 +8840,7 @@
         <p:spPr>
           <a:xfrm>
             <a:off x="6498183" y="4302252"/>
-            <a:ext cx="4806543" cy="656843"/>
+            <a:ext cx="4806543" cy="387096"/>
           </a:xfrm>
           <a:prstGeom prst="rect">
             <a:avLst/>
@@ -8859,13 +8859,13 @@
               </a:lnSpc>
             </a:pPr>
             <a:r>
-              <a:rPr sz="2100" b="1" i="0">
+              <a:rPr sz="2400" b="1" i="0">
                 <a:solidFill>
                   <a:srgbClr val="1D6B8F"/>
                 </a:solidFill>
                 <a:latin typeface="Verdana"/>
               </a:rPr>
-              <a:t>Ce qui change pour l'enseignant</a:t>
+              <a:t>Pour l'enseignant</a:t>
             </a:r>
           </a:p>
         </p:txBody>
@@ -8878,8 +8878,8 @@
         </p:nvSpPr>
         <p:spPr>
           <a:xfrm>
-            <a:off x="6498183" y="4986528"/>
-            <a:ext cx="4806543" cy="819912"/>
+            <a:off x="6498183" y="4716780"/>
+            <a:ext cx="4806543" cy="1089660"/>
           </a:xfrm>
           <a:prstGeom prst="rect">
             <a:avLst/>

--- a/assets/presentations/diaporamas/P2-ce-que-la-direction-decide.pptx
+++ b/assets/presentations/diaporamas/P2-ce-que-la-direction-decide.pptx
@@ -15,6 +15,9 @@
     <p:sldId id="263" r:id="rId15"/>
     <p:sldId id="264" r:id="rId16"/>
     <p:sldId id="265" r:id="rId17"/>
+    <p:sldId id="266" r:id="rId18"/>
+    <p:sldId id="267" r:id="rId19"/>
+    <p:sldId id="268" r:id="rId20"/>
   </p:sldIdLst>
   <p:sldSz cx="12191695" cy="6858000" type="screen4x3"/>
   <p:notesSz cx="6858000" cy="9144000"/>
@@ -581,6 +584,216 @@
           <a:lstStyle/>
           <a:p>
             <a:r>
+              <a:t>C'est ici qu'on ouvre le bac à sable si quelqu'un doute. Deux clics suffisent à montrer la même page dans les deux états.</a:t>
+            </a:r>
+          </a:p>
+        </p:txBody>
+      </p:sp>
+      <p:sp>
+        <p:nvSpPr>
+          <p:cNvPr id="4" name="Slide Number Placeholder 3"/>
+          <p:cNvSpPr>
+            <a:spLocks noGrp="1"/>
+          </p:cNvSpPr>
+          <p:nvPr>
+            <p:ph type="sldNum" idx="5" sz="quarter"/>
+          </p:nvPr>
+        </p:nvSpPr>
+        <p:spPr/>
+      </p:sp>
+    </p:spTree>
+  </p:cSld>
+  <p:clrMapOvr>
+    <a:masterClrMapping/>
+  </p:clrMapOvr>
+</p:notes>
+</file>
+
+<file path=ppt/notesSlides/notesSlide11.xml><?xml version="1.0" encoding="utf-8"?>
+<p:notes xmlns:a="http://schemas.openxmlformats.org/drawingml/2006/main" xmlns:p="http://schemas.openxmlformats.org/presentationml/2006/main" xmlns:r="http://schemas.openxmlformats.org/officeDocument/2006/relationships">
+  <p:cSld>
+    <p:spTree>
+      <p:nvGrpSpPr>
+        <p:cNvPr id="1" name=""/>
+        <p:cNvGrpSpPr/>
+        <p:nvPr/>
+      </p:nvGrpSpPr>
+      <p:grpSpPr>
+        <a:xfrm>
+          <a:off x="0" y="0"/>
+          <a:ext cx="0" cy="0"/>
+          <a:chOff x="0" y="0"/>
+          <a:chExt cx="0" cy="0"/>
+        </a:xfrm>
+      </p:grpSpPr>
+      <p:sp>
+        <p:nvSpPr>
+          <p:cNvPr id="2" name="Slide Image Placeholder 1"/>
+          <p:cNvSpPr>
+            <a:spLocks noGrp="1"/>
+          </p:cNvSpPr>
+          <p:nvPr>
+            <p:ph type="sldImg" idx="2"/>
+          </p:nvPr>
+        </p:nvSpPr>
+        <p:spPr/>
+      </p:sp>
+      <p:sp>
+        <p:nvSpPr>
+          <p:cNvPr id="3" name="Notes Placeholder 2"/>
+          <p:cNvSpPr>
+            <a:spLocks noGrp="1"/>
+          </p:cNvSpPr>
+          <p:nvPr>
+            <p:ph type="body" idx="3" sz="quarter"/>
+          </p:nvPr>
+        </p:nvSpPr>
+        <p:spPr/>
+        <p:txBody>
+          <a:bodyPr/>
+          <a:lstStyle/>
+          <a:p>
+            <a:r>
+              <a:t>Utile pour les groupes qui changent chaque semaine et pour les remplaçants : aucun compte à créer avant la première minute.</a:t>
+            </a:r>
+          </a:p>
+        </p:txBody>
+      </p:sp>
+      <p:sp>
+        <p:nvSpPr>
+          <p:cNvPr id="4" name="Slide Number Placeholder 3"/>
+          <p:cNvSpPr>
+            <a:spLocks noGrp="1"/>
+          </p:cNvSpPr>
+          <p:nvPr>
+            <p:ph type="sldNum" idx="5" sz="quarter"/>
+          </p:nvPr>
+        </p:nvSpPr>
+        <p:spPr/>
+      </p:sp>
+    </p:spTree>
+  </p:cSld>
+  <p:clrMapOvr>
+    <a:masterClrMapping/>
+  </p:clrMapOvr>
+</p:notes>
+</file>
+
+<file path=ppt/notesSlides/notesSlide12.xml><?xml version="1.0" encoding="utf-8"?>
+<p:notes xmlns:a="http://schemas.openxmlformats.org/drawingml/2006/main" xmlns:p="http://schemas.openxmlformats.org/presentationml/2006/main" xmlns:r="http://schemas.openxmlformats.org/officeDocument/2006/relationships">
+  <p:cSld>
+    <p:spTree>
+      <p:nvGrpSpPr>
+        <p:cNvPr id="1" name=""/>
+        <p:cNvGrpSpPr/>
+        <p:nvPr/>
+      </p:nvGrpSpPr>
+      <p:grpSpPr>
+        <a:xfrm>
+          <a:off x="0" y="0"/>
+          <a:ext cx="0" cy="0"/>
+          <a:chOff x="0" y="0"/>
+          <a:chExt cx="0" cy="0"/>
+        </a:xfrm>
+      </p:grpSpPr>
+      <p:sp>
+        <p:nvSpPr>
+          <p:cNvPr id="2" name="Slide Image Placeholder 1"/>
+          <p:cNvSpPr>
+            <a:spLocks noGrp="1"/>
+          </p:cNvSpPr>
+          <p:nvPr>
+            <p:ph type="sldImg" idx="2"/>
+          </p:nvPr>
+        </p:nvSpPr>
+        <p:spPr/>
+      </p:sp>
+      <p:sp>
+        <p:nvSpPr>
+          <p:cNvPr id="3" name="Notes Placeholder 2"/>
+          <p:cNvSpPr>
+            <a:spLocks noGrp="1"/>
+          </p:cNvSpPr>
+          <p:nvPr>
+            <p:ph type="body" idx="3" sz="quarter"/>
+          </p:nvPr>
+        </p:nvSpPr>
+        <p:spPr/>
+        <p:txBody>
+          <a:bodyPr/>
+          <a:lstStyle/>
+          <a:p>
+            <a:r>
+              <a:t>Enchaîner tout de suite sur la feuille imprimable si on la demande — elle est dans l'annexe A1.</a:t>
+            </a:r>
+          </a:p>
+        </p:txBody>
+      </p:sp>
+      <p:sp>
+        <p:nvSpPr>
+          <p:cNvPr id="4" name="Slide Number Placeholder 3"/>
+          <p:cNvSpPr>
+            <a:spLocks noGrp="1"/>
+          </p:cNvSpPr>
+          <p:nvPr>
+            <p:ph type="sldNum" idx="5" sz="quarter"/>
+          </p:nvPr>
+        </p:nvSpPr>
+        <p:spPr/>
+      </p:sp>
+    </p:spTree>
+  </p:cSld>
+  <p:clrMapOvr>
+    <a:masterClrMapping/>
+  </p:clrMapOvr>
+</p:notes>
+</file>
+
+<file path=ppt/notesSlides/notesSlide13.xml><?xml version="1.0" encoding="utf-8"?>
+<p:notes xmlns:a="http://schemas.openxmlformats.org/drawingml/2006/main" xmlns:p="http://schemas.openxmlformats.org/presentationml/2006/main" xmlns:r="http://schemas.openxmlformats.org/officeDocument/2006/relationships">
+  <p:cSld>
+    <p:spTree>
+      <p:nvGrpSpPr>
+        <p:cNvPr id="1" name=""/>
+        <p:cNvGrpSpPr/>
+        <p:nvPr/>
+      </p:nvGrpSpPr>
+      <p:grpSpPr>
+        <a:xfrm>
+          <a:off x="0" y="0"/>
+          <a:ext cx="0" cy="0"/>
+          <a:chOff x="0" y="0"/>
+          <a:chExt cx="0" cy="0"/>
+        </a:xfrm>
+      </p:grpSpPr>
+      <p:sp>
+        <p:nvSpPr>
+          <p:cNvPr id="2" name="Slide Image Placeholder 1"/>
+          <p:cNvSpPr>
+            <a:spLocks noGrp="1"/>
+          </p:cNvSpPr>
+          <p:nvPr>
+            <p:ph type="sldImg" idx="2"/>
+          </p:nvPr>
+        </p:nvSpPr>
+        <p:spPr/>
+      </p:sp>
+      <p:sp>
+        <p:nvSpPr>
+          <p:cNvPr id="3" name="Notes Placeholder 2"/>
+          <p:cNvSpPr>
+            <a:spLocks noGrp="1"/>
+          </p:cNvSpPr>
+          <p:nvPr>
+            <p:ph type="body" idx="3" sz="quarter"/>
+          </p:nvPr>
+        </p:nvSpPr>
+        <p:spPr/>
+        <p:txBody>
+          <a:bodyPr/>
+          <a:lstStyle/>
+          <a:p>
+            <a:r>
               <a:t>Terminer en proposant un groupe pilote avec le réglage le plus prudent. C'est plus facile à accorder qu'un accord de principe.</a:t>
             </a:r>
           </a:p>
@@ -931,7 +1144,7 @@
           <a:lstStyle/>
           <a:p>
             <a:r>
-              <a:t>Question qui vient toujours : « et si un centre veut l'inverse du CSS ? ». Réponse : il le pose sur lui-même, et c'est lui qui gagne.</a:t>
+              <a:t>Montrer le badge qui dit d'où vient la décision. Une direction comprend l'héritage en le voyant, jamais en l'écoutant décrire.</a:t>
             </a:r>
           </a:p>
         </p:txBody>
@@ -1001,7 +1214,7 @@
           <a:lstStyle/>
           <a:p>
             <a:r>
-              <a:t>Ne pas vendre le mode sans assistance comme équivalent. Dire le coût : le travail de correction revient à l'enseignant.</a:t>
+              <a:t>Question qui vient toujours : « et si un centre veut l'inverse du CSS ? ». Réponse : il le pose sur lui-même, et c'est lui qui gagne.</a:t>
             </a:r>
           </a:p>
         </p:txBody>
@@ -1071,7 +1284,7 @@
           <a:lstStyle/>
           <a:p>
             <a:r>
-              <a:t>C'est ici qu'on ouvre le bac à sable si quelqu'un doute. Deux clics suffisent à montrer la même page dans les deux états.</a:t>
+              <a:t>Ne pas vendre le mode sans assistance comme équivalent. Dire le coût : le travail de correction revient à l'enseignant.</a:t>
             </a:r>
           </a:p>
         </p:txBody>
@@ -1141,7 +1354,7 @@
           <a:lstStyle/>
           <a:p>
             <a:r>
-              <a:t>Utile pour les groupes qui changent chaque semaine et pour les remplaçants : aucun compte à créer avant la première minute.</a:t>
+              <a:t>C'est la diapositive qui désamorce « vous gardez leurs textes ». La correction est privée ; l'envoi est un geste de l'élève.</a:t>
             </a:r>
           </a:p>
         </p:txBody>
@@ -4531,6 +4744,1461 @@
       </p:sp>
       <p:sp>
         <p:nvSpPr>
+          <p:cNvPr id="5" name="TextBox 4"/>
+          <p:cNvSpPr txBox="1"/>
+          <p:nvPr/>
+        </p:nvSpPr>
+        <p:spPr>
+          <a:xfrm>
+            <a:off x="566928" y="420624"/>
+            <a:ext cx="11057839" cy="237744"/>
+          </a:xfrm>
+          <a:prstGeom prst="rect">
+            <a:avLst/>
+          </a:prstGeom>
+          <a:noFill/>
+        </p:spPr>
+        <p:txBody>
+          <a:bodyPr wrap="square" lIns="0" rIns="0" tIns="0" bIns="0" anchor="t">
+            <a:spAutoFit/>
+          </a:bodyPr>
+          <a:lstStyle/>
+          <a:p>
+            <a:pPr algn="l">
+              <a:lnSpc>
+                <a:spcPct val="135000"/>
+              </a:lnSpc>
+            </a:pPr>
+            <a:r>
+              <a:rPr sz="1300" b="1" i="0" spc="156">
+                <a:solidFill>
+                  <a:srgbClr val="1D6B8F"/>
+                </a:solidFill>
+                <a:latin typeface="Verdana"/>
+              </a:rPr>
+              <a:t>LE MALENTENDU LE PLUS FRÉQUENT</a:t>
+            </a:r>
+          </a:p>
+        </p:txBody>
+      </p:sp>
+      <p:sp>
+        <p:nvSpPr>
+          <p:cNvPr id="6" name="TextBox 5"/>
+          <p:cNvSpPr txBox="1"/>
+          <p:nvPr/>
+        </p:nvSpPr>
+        <p:spPr>
+          <a:xfrm>
+            <a:off x="566928" y="749808"/>
+            <a:ext cx="11057839" cy="877824"/>
+          </a:xfrm>
+          <a:prstGeom prst="rect">
+            <a:avLst/>
+          </a:prstGeom>
+          <a:noFill/>
+        </p:spPr>
+        <p:txBody>
+          <a:bodyPr wrap="square" lIns="0" rIns="0" tIns="0" bIns="0" anchor="t">
+            <a:spAutoFit/>
+          </a:bodyPr>
+          <a:lstStyle/>
+          <a:p>
+            <a:pPr algn="l">
+              <a:lnSpc>
+                <a:spcPct val="115000"/>
+              </a:lnSpc>
+            </a:pPr>
+            <a:r>
+              <a:rPr sz="3400" b="1" i="0">
+                <a:solidFill>
+                  <a:srgbClr val="17181A"/>
+                </a:solidFill>
+                <a:latin typeface="Verdana"/>
+              </a:rPr>
+              <a:t>Le piège le plus fréquent</a:t>
+            </a:r>
+          </a:p>
+        </p:txBody>
+      </p:sp>
+      <p:sp>
+        <p:nvSpPr>
+          <p:cNvPr id="7" name="Rounded Rectangle 6"/>
+          <p:cNvSpPr/>
+          <p:nvPr/>
+        </p:nvSpPr>
+        <p:spPr>
+          <a:xfrm>
+            <a:off x="566928" y="1856232"/>
+            <a:ext cx="5428335" cy="2331720"/>
+          </a:xfrm>
+          <a:prstGeom prst="roundRect">
+            <a:avLst>
+              <a:gd name="adj" fmla="val 6274"/>
+            </a:avLst>
+          </a:prstGeom>
+          <a:solidFill>
+            <a:srgbClr val="FFF6F5"/>
+          </a:solidFill>
+          <a:ln w="12700">
+            <a:solidFill>
+              <a:srgbClr val="DC2626"/>
+            </a:solidFill>
+          </a:ln>
+          <a:effectLst/>
+        </p:spPr>
+        <p:style>
+          <a:lnRef idx="1">
+            <a:schemeClr val="accent1"/>
+          </a:lnRef>
+          <a:fillRef idx="3">
+            <a:schemeClr val="accent1"/>
+          </a:fillRef>
+          <a:effectRef idx="2">
+            <a:schemeClr val="accent1"/>
+          </a:effectRef>
+          <a:fontRef idx="minor">
+            <a:schemeClr val="lt1"/>
+          </a:fontRef>
+        </p:style>
+        <p:txBody>
+          <a:bodyPr rtlCol="0" anchor="ctr"/>
+          <a:lstStyle/>
+          <a:p/>
+        </p:txBody>
+      </p:sp>
+      <p:sp>
+        <p:nvSpPr>
+          <p:cNvPr id="8" name="TextBox 7"/>
+          <p:cNvSpPr txBox="1"/>
+          <p:nvPr/>
+        </p:nvSpPr>
+        <p:spPr>
+          <a:xfrm>
+            <a:off x="932688" y="2130552"/>
+            <a:ext cx="4696815" cy="274320"/>
+          </a:xfrm>
+          <a:prstGeom prst="rect">
+            <a:avLst/>
+          </a:prstGeom>
+          <a:noFill/>
+        </p:spPr>
+        <p:txBody>
+          <a:bodyPr wrap="square" lIns="0" rIns="0" tIns="0" bIns="0" anchor="t">
+            <a:spAutoFit/>
+          </a:bodyPr>
+          <a:lstStyle/>
+          <a:p>
+            <a:pPr algn="l">
+              <a:lnSpc>
+                <a:spcPct val="135000"/>
+              </a:lnSpc>
+            </a:pPr>
+            <a:r>
+              <a:rPr sz="1300" b="1" i="0" spc="156">
+                <a:solidFill>
+                  <a:srgbClr val="B91C1C"/>
+                </a:solidFill>
+                <a:latin typeface="Verdana"/>
+              </a:rPr>
+              <a:t>ON ENTEND SOUVENT</a:t>
+            </a:r>
+          </a:p>
+        </p:txBody>
+      </p:sp>
+      <p:sp>
+        <p:nvSpPr>
+          <p:cNvPr id="9" name="TextBox 8"/>
+          <p:cNvSpPr txBox="1"/>
+          <p:nvPr/>
+        </p:nvSpPr>
+        <p:spPr>
+          <a:xfrm>
+            <a:off x="932688" y="2569464"/>
+            <a:ext cx="4696815" cy="1417320"/>
+          </a:xfrm>
+          <a:prstGeom prst="rect">
+            <a:avLst/>
+          </a:prstGeom>
+          <a:noFill/>
+        </p:spPr>
+        <p:txBody>
+          <a:bodyPr wrap="square" lIns="0" rIns="0" tIns="0" bIns="0" anchor="t">
+            <a:spAutoFit/>
+          </a:bodyPr>
+          <a:lstStyle/>
+          <a:p>
+            <a:pPr algn="l">
+              <a:lnSpc>
+                <a:spcPct val="130000"/>
+              </a:lnSpc>
+            </a:pPr>
+            <a:r>
+              <a:rPr sz="2500" b="1" i="0">
+                <a:solidFill>
+                  <a:srgbClr val="17181A"/>
+                </a:solidFill>
+                <a:latin typeface="Verdana"/>
+              </a:rPr>
+              <a:t>« Fermer l'assistant, c'est perdre le cours. »</a:t>
+            </a:r>
+          </a:p>
+        </p:txBody>
+      </p:sp>
+      <p:sp>
+        <p:nvSpPr>
+          <p:cNvPr id="10" name="Rounded Rectangle 9"/>
+          <p:cNvSpPr/>
+          <p:nvPr/>
+        </p:nvSpPr>
+        <p:spPr>
+          <a:xfrm>
+            <a:off x="6196431" y="1856232"/>
+            <a:ext cx="5428335" cy="2331720"/>
+          </a:xfrm>
+          <a:prstGeom prst="roundRect">
+            <a:avLst>
+              <a:gd name="adj" fmla="val 6274"/>
+            </a:avLst>
+          </a:prstGeom>
+          <a:solidFill>
+            <a:srgbClr val="E6F5EE"/>
+          </a:solidFill>
+          <a:ln w="12700">
+            <a:solidFill>
+              <a:srgbClr val="0A8F5B"/>
+            </a:solidFill>
+          </a:ln>
+          <a:effectLst/>
+        </p:spPr>
+        <p:style>
+          <a:lnRef idx="1">
+            <a:schemeClr val="accent1"/>
+          </a:lnRef>
+          <a:fillRef idx="3">
+            <a:schemeClr val="accent1"/>
+          </a:fillRef>
+          <a:effectRef idx="2">
+            <a:schemeClr val="accent1"/>
+          </a:effectRef>
+          <a:fontRef idx="minor">
+            <a:schemeClr val="lt1"/>
+          </a:fontRef>
+        </p:style>
+        <p:txBody>
+          <a:bodyPr rtlCol="0" anchor="ctr"/>
+          <a:lstStyle/>
+          <a:p/>
+        </p:txBody>
+      </p:sp>
+      <p:sp>
+        <p:nvSpPr>
+          <p:cNvPr id="11" name="TextBox 10"/>
+          <p:cNvSpPr txBox="1"/>
+          <p:nvPr/>
+        </p:nvSpPr>
+        <p:spPr>
+          <a:xfrm>
+            <a:off x="6562191" y="2130552"/>
+            <a:ext cx="4696815" cy="274320"/>
+          </a:xfrm>
+          <a:prstGeom prst="rect">
+            <a:avLst/>
+          </a:prstGeom>
+          <a:noFill/>
+        </p:spPr>
+        <p:txBody>
+          <a:bodyPr wrap="square" lIns="0" rIns="0" tIns="0" bIns="0" anchor="t">
+            <a:spAutoFit/>
+          </a:bodyPr>
+          <a:lstStyle/>
+          <a:p>
+            <a:pPr algn="l">
+              <a:lnSpc>
+                <a:spcPct val="135000"/>
+              </a:lnSpc>
+            </a:pPr>
+            <a:r>
+              <a:rPr sz="1300" b="1" i="0" spc="156">
+                <a:solidFill>
+                  <a:srgbClr val="07734A"/>
+                </a:solidFill>
+                <a:latin typeface="Verdana"/>
+              </a:rPr>
+              <a:t>IL FAUT DIRE PLUTÔT</a:t>
+            </a:r>
+          </a:p>
+        </p:txBody>
+      </p:sp>
+      <p:sp>
+        <p:nvSpPr>
+          <p:cNvPr id="12" name="TextBox 11"/>
+          <p:cNvSpPr txBox="1"/>
+          <p:nvPr/>
+        </p:nvSpPr>
+        <p:spPr>
+          <a:xfrm>
+            <a:off x="6562191" y="2569464"/>
+            <a:ext cx="4696815" cy="1417320"/>
+          </a:xfrm>
+          <a:prstGeom prst="rect">
+            <a:avLst/>
+          </a:prstGeom>
+          <a:noFill/>
+        </p:spPr>
+        <p:txBody>
+          <a:bodyPr wrap="square" lIns="0" rIns="0" tIns="0" bIns="0" anchor="t">
+            <a:spAutoFit/>
+          </a:bodyPr>
+          <a:lstStyle/>
+          <a:p>
+            <a:pPr algn="l">
+              <a:lnSpc>
+                <a:spcPct val="130000"/>
+              </a:lnSpc>
+            </a:pPr>
+            <a:r>
+              <a:rPr sz="2400" b="1" i="0">
+                <a:solidFill>
+                  <a:srgbClr val="17181A"/>
+                </a:solidFill>
+                <a:latin typeface="Verdana"/>
+              </a:rPr>
+              <a:t>« Fermer l'assistant, c'est perdre l'aide immédiate, pas le cours. »</a:t>
+            </a:r>
+          </a:p>
+        </p:txBody>
+      </p:sp>
+      <p:sp>
+        <p:nvSpPr>
+          <p:cNvPr id="13" name="Rounded Rectangle 12"/>
+          <p:cNvSpPr/>
+          <p:nvPr/>
+        </p:nvSpPr>
+        <p:spPr>
+          <a:xfrm>
+            <a:off x="566928" y="4462272"/>
+            <a:ext cx="11057839" cy="1618487"/>
+          </a:xfrm>
+          <a:prstGeom prst="roundRect">
+            <a:avLst>
+              <a:gd name="adj" fmla="val 9039"/>
+            </a:avLst>
+          </a:prstGeom>
+          <a:solidFill>
+            <a:srgbClr val="FFFFFF"/>
+          </a:solidFill>
+          <a:ln w="12700">
+            <a:solidFill>
+              <a:srgbClr val="EAEAE8"/>
+            </a:solidFill>
+          </a:ln>
+          <a:effectLst/>
+        </p:spPr>
+        <p:style>
+          <a:lnRef idx="1">
+            <a:schemeClr val="accent1"/>
+          </a:lnRef>
+          <a:fillRef idx="3">
+            <a:schemeClr val="accent1"/>
+          </a:fillRef>
+          <a:effectRef idx="2">
+            <a:schemeClr val="accent1"/>
+          </a:effectRef>
+          <a:fontRef idx="minor">
+            <a:schemeClr val="lt1"/>
+          </a:fontRef>
+        </p:style>
+        <p:txBody>
+          <a:bodyPr rtlCol="0" anchor="ctr"/>
+          <a:lstStyle/>
+          <a:p/>
+        </p:txBody>
+      </p:sp>
+      <p:sp>
+        <p:nvSpPr>
+          <p:cNvPr id="14" name="TextBox 13"/>
+          <p:cNvSpPr txBox="1"/>
+          <p:nvPr/>
+        </p:nvSpPr>
+        <p:spPr>
+          <a:xfrm>
+            <a:off x="969264" y="4736592"/>
+            <a:ext cx="10234879" cy="1150620"/>
+          </a:xfrm>
+          <a:prstGeom prst="rect">
+            <a:avLst/>
+          </a:prstGeom>
+          <a:noFill/>
+        </p:spPr>
+        <p:txBody>
+          <a:bodyPr wrap="square" lIns="0" rIns="0" tIns="0" bIns="0" anchor="t">
+            <a:spAutoFit/>
+          </a:bodyPr>
+          <a:lstStyle/>
+          <a:p>
+            <a:pPr algn="l">
+              <a:lnSpc>
+                <a:spcPct val="145000"/>
+              </a:lnSpc>
+            </a:pPr>
+            <a:r>
+              <a:rPr sz="2000" b="0" i="0">
+                <a:solidFill>
+                  <a:srgbClr val="4B4F52"/>
+                </a:solidFill>
+                <a:latin typeface="Verdana"/>
+              </a:rPr>
+              <a:t>Les 21 403 pistes audio sont enregistrées d'avance et les exercices à réponse connue se corrigent sur l'appareil : un centre sans assistant garde le matériel entier et ne paie plus rien à l'usage.</a:t>
+            </a:r>
+          </a:p>
+        </p:txBody>
+      </p:sp>
+    </p:spTree>
+  </p:cSld>
+  <p:clrMapOvr>
+    <a:masterClrMapping/>
+  </p:clrMapOvr>
+</p:sld>
+</file>
+
+<file path=ppt/slides/slide11.xml><?xml version="1.0" encoding="utf-8"?>
+<p:sld xmlns:a="http://schemas.openxmlformats.org/drawingml/2006/main" xmlns:p="http://schemas.openxmlformats.org/presentationml/2006/main" xmlns:r="http://schemas.openxmlformats.org/officeDocument/2006/relationships">
+  <p:cSld>
+    <p:spTree>
+      <p:nvGrpSpPr>
+        <p:cNvPr id="1" name=""/>
+        <p:cNvGrpSpPr/>
+        <p:nvPr/>
+      </p:nvGrpSpPr>
+      <p:grpSpPr/>
+      <p:sp>
+        <p:nvSpPr>
+          <p:cNvPr id="2" name="Rectangle 1"/>
+          <p:cNvSpPr/>
+          <p:nvPr/>
+        </p:nvSpPr>
+        <p:spPr>
+          <a:xfrm>
+            <a:off x="0" y="0"/>
+            <a:ext cx="12191695" cy="6858000"/>
+          </a:xfrm>
+          <a:prstGeom prst="rect">
+            <a:avLst/>
+          </a:prstGeom>
+          <a:solidFill>
+            <a:srgbClr val="F7F7F5"/>
+          </a:solidFill>
+          <a:ln>
+            <a:noFill/>
+          </a:ln>
+          <a:effectLst/>
+        </p:spPr>
+        <p:style>
+          <a:lnRef idx="1">
+            <a:schemeClr val="accent1"/>
+          </a:lnRef>
+          <a:fillRef idx="3">
+            <a:schemeClr val="accent1"/>
+          </a:fillRef>
+          <a:effectRef idx="2">
+            <a:schemeClr val="accent1"/>
+          </a:effectRef>
+          <a:fontRef idx="minor">
+            <a:schemeClr val="lt1"/>
+          </a:fontRef>
+        </p:style>
+        <p:txBody>
+          <a:bodyPr rtlCol="0" anchor="ctr"/>
+          <a:lstStyle/>
+          <a:p/>
+        </p:txBody>
+      </p:sp>
+      <p:sp>
+        <p:nvSpPr>
+          <p:cNvPr id="3" name="TextBox 2"/>
+          <p:cNvSpPr txBox="1"/>
+          <p:nvPr/>
+        </p:nvSpPr>
+        <p:spPr>
+          <a:xfrm>
+            <a:off x="566928" y="6355080"/>
+            <a:ext cx="6400800" cy="219456"/>
+          </a:xfrm>
+          <a:prstGeom prst="rect">
+            <a:avLst/>
+          </a:prstGeom>
+          <a:noFill/>
+        </p:spPr>
+        <p:txBody>
+          <a:bodyPr wrap="square" lIns="0" rIns="0" tIns="0" bIns="0" anchor="t">
+            <a:spAutoFit/>
+          </a:bodyPr>
+          <a:lstStyle/>
+          <a:p>
+            <a:pPr algn="l">
+              <a:lnSpc>
+                <a:spcPct val="135000"/>
+              </a:lnSpc>
+            </a:pPr>
+            <a:r>
+              <a:rPr sz="1200" b="0" i="0">
+                <a:solidFill>
+                  <a:srgbClr val="6E7175"/>
+                </a:solidFill>
+                <a:latin typeface="Verdana"/>
+              </a:rPr>
+              <a:t>P2 · francis · présentation</a:t>
+            </a:r>
+          </a:p>
+        </p:txBody>
+      </p:sp>
+      <p:sp>
+        <p:nvSpPr>
+          <p:cNvPr id="4" name="TextBox 3"/>
+          <p:cNvSpPr txBox="1"/>
+          <p:nvPr/>
+        </p:nvSpPr>
+        <p:spPr>
+          <a:xfrm>
+            <a:off x="10710367" y="6355080"/>
+            <a:ext cx="914400" cy="219456"/>
+          </a:xfrm>
+          <a:prstGeom prst="rect">
+            <a:avLst/>
+          </a:prstGeom>
+          <a:noFill/>
+        </p:spPr>
+        <p:txBody>
+          <a:bodyPr wrap="square" lIns="0" rIns="0" tIns="0" bIns="0" anchor="t">
+            <a:spAutoFit/>
+          </a:bodyPr>
+          <a:lstStyle/>
+          <a:p>
+            <a:pPr algn="r">
+              <a:lnSpc>
+                <a:spcPct val="135000"/>
+              </a:lnSpc>
+            </a:pPr>
+            <a:r>
+              <a:rPr sz="1200" b="0" i="0">
+                <a:solidFill>
+                  <a:srgbClr val="6E7175"/>
+                </a:solidFill>
+                <a:latin typeface="Verdana"/>
+              </a:rPr>
+              <a:t>11</a:t>
+            </a:r>
+          </a:p>
+        </p:txBody>
+      </p:sp>
+      <p:sp>
+        <p:nvSpPr>
+          <p:cNvPr id="5" name="TextBox 4"/>
+          <p:cNvSpPr txBox="1"/>
+          <p:nvPr/>
+        </p:nvSpPr>
+        <p:spPr>
+          <a:xfrm>
+            <a:off x="566928" y="420624"/>
+            <a:ext cx="11057839" cy="237744"/>
+          </a:xfrm>
+          <a:prstGeom prst="rect">
+            <a:avLst/>
+          </a:prstGeom>
+          <a:noFill/>
+        </p:spPr>
+        <p:txBody>
+          <a:bodyPr wrap="square" lIns="0" rIns="0" tIns="0" bIns="0" anchor="t">
+            <a:spAutoFit/>
+          </a:bodyPr>
+          <a:lstStyle/>
+          <a:p>
+            <a:pPr algn="l">
+              <a:lnSpc>
+                <a:spcPct val="135000"/>
+              </a:lnSpc>
+            </a:pPr>
+            <a:r>
+              <a:rPr sz="1300" b="1" i="0" spc="156">
+                <a:solidFill>
+                  <a:srgbClr val="1D6B8F"/>
+                </a:solidFill>
+                <a:latin typeface="Verdana"/>
+              </a:rPr>
+              <a:t>LE TROISIÈME MODE</a:t>
+            </a:r>
+          </a:p>
+        </p:txBody>
+      </p:sp>
+      <p:sp>
+        <p:nvSpPr>
+          <p:cNvPr id="6" name="TextBox 5"/>
+          <p:cNvSpPr txBox="1"/>
+          <p:nvPr/>
+        </p:nvSpPr>
+        <p:spPr>
+          <a:xfrm>
+            <a:off x="566928" y="749808"/>
+            <a:ext cx="11057839" cy="877824"/>
+          </a:xfrm>
+          <a:prstGeom prst="rect">
+            <a:avLst/>
+          </a:prstGeom>
+          <a:noFill/>
+        </p:spPr>
+        <p:txBody>
+          <a:bodyPr wrap="square" lIns="0" rIns="0" tIns="0" bIns="0" anchor="t">
+            <a:spAutoFit/>
+          </a:bodyPr>
+          <a:lstStyle/>
+          <a:p>
+            <a:pPr algn="l">
+              <a:lnSpc>
+                <a:spcPct val="115000"/>
+              </a:lnSpc>
+            </a:pPr>
+            <a:r>
+              <a:rPr sz="3400" b="1" i="0">
+                <a:solidFill>
+                  <a:srgbClr val="17181A"/>
+                </a:solidFill>
+                <a:latin typeface="Verdana"/>
+              </a:rPr>
+              <a:t>Une classe sans compte d'élève</a:t>
+            </a:r>
+          </a:p>
+        </p:txBody>
+      </p:sp>
+      <p:sp>
+        <p:nvSpPr>
+          <p:cNvPr id="7" name="Rounded Rectangle 6"/>
+          <p:cNvSpPr/>
+          <p:nvPr/>
+        </p:nvSpPr>
+        <p:spPr>
+          <a:xfrm>
+            <a:off x="566928" y="1810512"/>
+            <a:ext cx="11057839" cy="2084832"/>
+          </a:xfrm>
+          <a:prstGeom prst="roundRect">
+            <a:avLst>
+              <a:gd name="adj" fmla="val 7017"/>
+            </a:avLst>
+          </a:prstGeom>
+          <a:solidFill>
+            <a:srgbClr val="FFFFFF"/>
+          </a:solidFill>
+          <a:ln w="12700">
+            <a:solidFill>
+              <a:srgbClr val="EAEAE8"/>
+            </a:solidFill>
+          </a:ln>
+          <a:effectLst/>
+        </p:spPr>
+        <p:style>
+          <a:lnRef idx="1">
+            <a:schemeClr val="accent1"/>
+          </a:lnRef>
+          <a:fillRef idx="3">
+            <a:schemeClr val="accent1"/>
+          </a:fillRef>
+          <a:effectRef idx="2">
+            <a:schemeClr val="accent1"/>
+          </a:effectRef>
+          <a:fontRef idx="minor">
+            <a:schemeClr val="lt1"/>
+          </a:fontRef>
+        </p:style>
+        <p:txBody>
+          <a:bodyPr rtlCol="0" anchor="ctr"/>
+          <a:lstStyle/>
+          <a:p/>
+        </p:txBody>
+      </p:sp>
+      <p:sp>
+        <p:nvSpPr>
+          <p:cNvPr id="8" name="TextBox 7"/>
+          <p:cNvSpPr txBox="1"/>
+          <p:nvPr/>
+        </p:nvSpPr>
+        <p:spPr>
+          <a:xfrm>
+            <a:off x="932688" y="1975104"/>
+            <a:ext cx="3222650" cy="237744"/>
+          </a:xfrm>
+          <a:prstGeom prst="rect">
+            <a:avLst/>
+          </a:prstGeom>
+          <a:noFill/>
+        </p:spPr>
+        <p:txBody>
+          <a:bodyPr wrap="square" lIns="0" rIns="0" tIns="0" bIns="0" anchor="t">
+            <a:spAutoFit/>
+          </a:bodyPr>
+          <a:lstStyle/>
+          <a:p>
+            <a:pPr algn="l">
+              <a:lnSpc>
+                <a:spcPct val="135000"/>
+              </a:lnSpc>
+            </a:pPr>
+            <a:r>
+              <a:rPr sz="1300" b="1" i="0" spc="156">
+                <a:solidFill>
+                  <a:srgbClr val="6E7175"/>
+                </a:solidFill>
+                <a:latin typeface="Verdana"/>
+              </a:rPr>
+              <a:t>CE QUE L'ÉLÈVE DONNE</a:t>
+            </a:r>
+          </a:p>
+        </p:txBody>
+      </p:sp>
+      <p:sp>
+        <p:nvSpPr>
+          <p:cNvPr id="9" name="TextBox 8"/>
+          <p:cNvSpPr txBox="1"/>
+          <p:nvPr/>
+        </p:nvSpPr>
+        <p:spPr>
+          <a:xfrm>
+            <a:off x="4374794" y="1975104"/>
+            <a:ext cx="3222650" cy="237744"/>
+          </a:xfrm>
+          <a:prstGeom prst="rect">
+            <a:avLst/>
+          </a:prstGeom>
+          <a:noFill/>
+        </p:spPr>
+        <p:txBody>
+          <a:bodyPr wrap="square" lIns="0" rIns="0" tIns="0" bIns="0" anchor="t">
+            <a:spAutoFit/>
+          </a:bodyPr>
+          <a:lstStyle/>
+          <a:p>
+            <a:pPr algn="l">
+              <a:lnSpc>
+                <a:spcPct val="135000"/>
+              </a:lnSpc>
+            </a:pPr>
+            <a:r>
+              <a:rPr sz="1300" b="1" i="0" spc="156">
+                <a:solidFill>
+                  <a:srgbClr val="6E7175"/>
+                </a:solidFill>
+                <a:latin typeface="Verdana"/>
+              </a:rPr>
+              <a:t>CE QUE L'ENSEIGNANT VOIT</a:t>
+            </a:r>
+          </a:p>
+        </p:txBody>
+      </p:sp>
+      <p:sp>
+        <p:nvSpPr>
+          <p:cNvPr id="10" name="TextBox 9"/>
+          <p:cNvSpPr txBox="1"/>
+          <p:nvPr/>
+        </p:nvSpPr>
+        <p:spPr>
+          <a:xfrm>
+            <a:off x="7816900" y="1975104"/>
+            <a:ext cx="3222650" cy="237744"/>
+          </a:xfrm>
+          <a:prstGeom prst="rect">
+            <a:avLst/>
+          </a:prstGeom>
+          <a:noFill/>
+        </p:spPr>
+        <p:txBody>
+          <a:bodyPr wrap="square" lIns="0" rIns="0" tIns="0" bIns="0" anchor="t">
+            <a:spAutoFit/>
+          </a:bodyPr>
+          <a:lstStyle/>
+          <a:p>
+            <a:pPr algn="l">
+              <a:lnSpc>
+                <a:spcPct val="135000"/>
+              </a:lnSpc>
+            </a:pPr>
+            <a:r>
+              <a:rPr sz="1300" b="1" i="0" spc="156">
+                <a:solidFill>
+                  <a:srgbClr val="6E7175"/>
+                </a:solidFill>
+                <a:latin typeface="Verdana"/>
+              </a:rPr>
+              <a:t>CE QUI EST GARDÉ</a:t>
+            </a:r>
+          </a:p>
+        </p:txBody>
+      </p:sp>
+      <p:sp>
+        <p:nvSpPr>
+          <p:cNvPr id="11" name="TextBox 10"/>
+          <p:cNvSpPr txBox="1"/>
+          <p:nvPr/>
+        </p:nvSpPr>
+        <p:spPr>
+          <a:xfrm>
+            <a:off x="932688" y="2395728"/>
+            <a:ext cx="3222650" cy="1243584"/>
+          </a:xfrm>
+          <a:prstGeom prst="rect">
+            <a:avLst/>
+          </a:prstGeom>
+          <a:noFill/>
+        </p:spPr>
+        <p:txBody>
+          <a:bodyPr wrap="square" lIns="0" rIns="0" tIns="0" bIns="0" anchor="t">
+            <a:spAutoFit/>
+          </a:bodyPr>
+          <a:lstStyle/>
+          <a:p>
+            <a:pPr algn="l">
+              <a:lnSpc>
+                <a:spcPct val="132000"/>
+              </a:lnSpc>
+            </a:pPr>
+            <a:r>
+              <a:rPr sz="1800" b="0" i="0">
+                <a:solidFill>
+                  <a:srgbClr val="3A3D40"/>
+                </a:solidFill>
+                <a:latin typeface="Verdana"/>
+              </a:rPr>
+              <a:t>Rien : un code à six caractères, scanné sur une feuille photocopiée</a:t>
+            </a:r>
+          </a:p>
+        </p:txBody>
+      </p:sp>
+      <p:sp>
+        <p:nvSpPr>
+          <p:cNvPr id="12" name="TextBox 11"/>
+          <p:cNvSpPr txBox="1"/>
+          <p:nvPr/>
+        </p:nvSpPr>
+        <p:spPr>
+          <a:xfrm>
+            <a:off x="4374794" y="2395728"/>
+            <a:ext cx="3222650" cy="1243584"/>
+          </a:xfrm>
+          <a:prstGeom prst="rect">
+            <a:avLst/>
+          </a:prstGeom>
+          <a:noFill/>
+        </p:spPr>
+        <p:txBody>
+          <a:bodyPr wrap="square" lIns="0" rIns="0" tIns="0" bIns="0" anchor="t">
+            <a:spAutoFit/>
+          </a:bodyPr>
+          <a:lstStyle/>
+          <a:p>
+            <a:pPr algn="l">
+              <a:lnSpc>
+                <a:spcPct val="132000"/>
+              </a:lnSpc>
+            </a:pPr>
+            <a:r>
+              <a:rPr sz="1800" b="0" i="0">
+                <a:solidFill>
+                  <a:srgbClr val="3A3D40"/>
+                </a:solidFill>
+                <a:latin typeface="Verdana"/>
+              </a:rPr>
+              <a:t>Son tableau de classe, participant par participant, question par question</a:t>
+            </a:r>
+          </a:p>
+        </p:txBody>
+      </p:sp>
+      <p:sp>
+        <p:nvSpPr>
+          <p:cNvPr id="13" name="TextBox 12"/>
+          <p:cNvSpPr txBox="1"/>
+          <p:nvPr/>
+        </p:nvSpPr>
+        <p:spPr>
+          <a:xfrm>
+            <a:off x="7816900" y="2395728"/>
+            <a:ext cx="3222650" cy="1243584"/>
+          </a:xfrm>
+          <a:prstGeom prst="rect">
+            <a:avLst/>
+          </a:prstGeom>
+          <a:noFill/>
+        </p:spPr>
+        <p:txBody>
+          <a:bodyPr wrap="square" lIns="0" rIns="0" tIns="0" bIns="0" anchor="t">
+            <a:spAutoFit/>
+          </a:bodyPr>
+          <a:lstStyle/>
+          <a:p>
+            <a:pPr algn="l">
+              <a:lnSpc>
+                <a:spcPct val="132000"/>
+              </a:lnSpc>
+            </a:pPr>
+            <a:r>
+              <a:rPr sz="1800" b="0" i="0">
+                <a:solidFill>
+                  <a:srgbClr val="3A3D40"/>
+                </a:solidFill>
+                <a:latin typeface="Verdana"/>
+              </a:rPr>
+              <a:t>Aucun nom, aucun pseudonyme, aucune voix ; une séance qui expire le soir</a:t>
+            </a:r>
+          </a:p>
+        </p:txBody>
+      </p:sp>
+      <p:sp>
+        <p:nvSpPr>
+          <p:cNvPr id="14" name="Rounded Rectangle 13"/>
+          <p:cNvSpPr/>
+          <p:nvPr/>
+        </p:nvSpPr>
+        <p:spPr>
+          <a:xfrm>
+            <a:off x="566928" y="4133087"/>
+            <a:ext cx="11057839" cy="1175004"/>
+          </a:xfrm>
+          <a:prstGeom prst="roundRect">
+            <a:avLst>
+              <a:gd name="adj" fmla="val 12451"/>
+            </a:avLst>
+          </a:prstGeom>
+          <a:solidFill>
+            <a:srgbClr val="FBFBFA"/>
+          </a:solidFill>
+          <a:ln w="12700">
+            <a:solidFill>
+              <a:srgbClr val="EAEAE8"/>
+            </a:solidFill>
+          </a:ln>
+          <a:effectLst/>
+        </p:spPr>
+        <p:style>
+          <a:lnRef idx="1">
+            <a:schemeClr val="accent1"/>
+          </a:lnRef>
+          <a:fillRef idx="3">
+            <a:schemeClr val="accent1"/>
+          </a:fillRef>
+          <a:effectRef idx="2">
+            <a:schemeClr val="accent1"/>
+          </a:effectRef>
+          <a:fontRef idx="minor">
+            <a:schemeClr val="lt1"/>
+          </a:fontRef>
+        </p:style>
+        <p:txBody>
+          <a:bodyPr rtlCol="0" anchor="ctr"/>
+          <a:lstStyle/>
+          <a:p/>
+        </p:txBody>
+      </p:sp>
+      <p:sp>
+        <p:nvSpPr>
+          <p:cNvPr id="15" name="TextBox 14"/>
+          <p:cNvSpPr txBox="1"/>
+          <p:nvPr/>
+        </p:nvSpPr>
+        <p:spPr>
+          <a:xfrm>
+            <a:off x="969264" y="4389120"/>
+            <a:ext cx="10234879" cy="717804"/>
+          </a:xfrm>
+          <a:prstGeom prst="rect">
+            <a:avLst/>
+          </a:prstGeom>
+          <a:noFill/>
+        </p:spPr>
+        <p:txBody>
+          <a:bodyPr wrap="square" lIns="0" rIns="0" tIns="0" bIns="0" anchor="t">
+            <a:spAutoFit/>
+          </a:bodyPr>
+          <a:lstStyle/>
+          <a:p>
+            <a:pPr algn="l">
+              <a:lnSpc>
+                <a:spcPct val="145000"/>
+              </a:lnSpc>
+            </a:pPr>
+            <a:r>
+              <a:rPr sz="1800" b="0" i="0">
+                <a:solidFill>
+                  <a:srgbClr val="4B4F52"/>
+                </a:solidFill>
+                <a:latin typeface="Verdana"/>
+              </a:rPr>
+              <a:t>La direction autorise le mode ; l'enseignant décide de s'en servir un mardi matin. Les deux gestes sont distincts.</a:t>
+            </a:r>
+          </a:p>
+        </p:txBody>
+      </p:sp>
+    </p:spTree>
+  </p:cSld>
+  <p:clrMapOvr>
+    <a:masterClrMapping/>
+  </p:clrMapOvr>
+</p:sld>
+</file>
+
+<file path=ppt/slides/slide12.xml><?xml version="1.0" encoding="utf-8"?>
+<p:sld xmlns:a="http://schemas.openxmlformats.org/drawingml/2006/main" xmlns:p="http://schemas.openxmlformats.org/presentationml/2006/main" xmlns:r="http://schemas.openxmlformats.org/officeDocument/2006/relationships">
+  <p:cSld>
+    <p:spTree>
+      <p:nvGrpSpPr>
+        <p:cNvPr id="1" name=""/>
+        <p:cNvGrpSpPr/>
+        <p:nvPr/>
+      </p:nvGrpSpPr>
+      <p:grpSpPr/>
+      <p:sp>
+        <p:nvSpPr>
+          <p:cNvPr id="2" name="Rectangle 1"/>
+          <p:cNvSpPr/>
+          <p:nvPr/>
+        </p:nvSpPr>
+        <p:spPr>
+          <a:xfrm>
+            <a:off x="0" y="0"/>
+            <a:ext cx="12191695" cy="6858000"/>
+          </a:xfrm>
+          <a:prstGeom prst="rect">
+            <a:avLst/>
+          </a:prstGeom>
+          <a:solidFill>
+            <a:srgbClr val="F7F7F5"/>
+          </a:solidFill>
+          <a:ln>
+            <a:noFill/>
+          </a:ln>
+          <a:effectLst/>
+        </p:spPr>
+        <p:style>
+          <a:lnRef idx="1">
+            <a:schemeClr val="accent1"/>
+          </a:lnRef>
+          <a:fillRef idx="3">
+            <a:schemeClr val="accent1"/>
+          </a:fillRef>
+          <a:effectRef idx="2">
+            <a:schemeClr val="accent1"/>
+          </a:effectRef>
+          <a:fontRef idx="minor">
+            <a:schemeClr val="lt1"/>
+          </a:fontRef>
+        </p:style>
+        <p:txBody>
+          <a:bodyPr rtlCol="0" anchor="ctr"/>
+          <a:lstStyle/>
+          <a:p/>
+        </p:txBody>
+      </p:sp>
+      <p:sp>
+        <p:nvSpPr>
+          <p:cNvPr id="3" name="TextBox 2"/>
+          <p:cNvSpPr txBox="1"/>
+          <p:nvPr/>
+        </p:nvSpPr>
+        <p:spPr>
+          <a:xfrm>
+            <a:off x="566928" y="6355080"/>
+            <a:ext cx="6400800" cy="219456"/>
+          </a:xfrm>
+          <a:prstGeom prst="rect">
+            <a:avLst/>
+          </a:prstGeom>
+          <a:noFill/>
+        </p:spPr>
+        <p:txBody>
+          <a:bodyPr wrap="square" lIns="0" rIns="0" tIns="0" bIns="0" anchor="t">
+            <a:spAutoFit/>
+          </a:bodyPr>
+          <a:lstStyle/>
+          <a:p>
+            <a:pPr algn="l">
+              <a:lnSpc>
+                <a:spcPct val="135000"/>
+              </a:lnSpc>
+            </a:pPr>
+            <a:r>
+              <a:rPr sz="1200" b="0" i="0">
+                <a:solidFill>
+                  <a:srgbClr val="6E7175"/>
+                </a:solidFill>
+                <a:latin typeface="Verdana"/>
+              </a:rPr>
+              <a:t>P2 · francis · présentation</a:t>
+            </a:r>
+          </a:p>
+        </p:txBody>
+      </p:sp>
+      <p:sp>
+        <p:nvSpPr>
+          <p:cNvPr id="4" name="TextBox 3"/>
+          <p:cNvSpPr txBox="1"/>
+          <p:nvPr/>
+        </p:nvSpPr>
+        <p:spPr>
+          <a:xfrm>
+            <a:off x="10710367" y="6355080"/>
+            <a:ext cx="914400" cy="219456"/>
+          </a:xfrm>
+          <a:prstGeom prst="rect">
+            <a:avLst/>
+          </a:prstGeom>
+          <a:noFill/>
+        </p:spPr>
+        <p:txBody>
+          <a:bodyPr wrap="square" lIns="0" rIns="0" tIns="0" bIns="0" anchor="t">
+            <a:spAutoFit/>
+          </a:bodyPr>
+          <a:lstStyle/>
+          <a:p>
+            <a:pPr algn="r">
+              <a:lnSpc>
+                <a:spcPct val="135000"/>
+              </a:lnSpc>
+            </a:pPr>
+            <a:r>
+              <a:rPr sz="1200" b="0" i="0">
+                <a:solidFill>
+                  <a:srgbClr val="6E7175"/>
+                </a:solidFill>
+                <a:latin typeface="Verdana"/>
+              </a:rPr>
+              <a:t>12</a:t>
+            </a:r>
+          </a:p>
+        </p:txBody>
+      </p:sp>
+      <p:sp>
+        <p:nvSpPr>
+          <p:cNvPr id="5" name="TextBox 4"/>
+          <p:cNvSpPr txBox="1"/>
+          <p:nvPr/>
+        </p:nvSpPr>
+        <p:spPr>
+          <a:xfrm>
+            <a:off x="566928" y="420624"/>
+            <a:ext cx="11057839" cy="237744"/>
+          </a:xfrm>
+          <a:prstGeom prst="rect">
+            <a:avLst/>
+          </a:prstGeom>
+          <a:noFill/>
+        </p:spPr>
+        <p:txBody>
+          <a:bodyPr wrap="square" lIns="0" rIns="0" tIns="0" bIns="0" anchor="t">
+            <a:spAutoFit/>
+          </a:bodyPr>
+          <a:lstStyle/>
+          <a:p>
+            <a:pPr algn="l">
+              <a:lnSpc>
+                <a:spcPct val="135000"/>
+              </a:lnSpc>
+            </a:pPr>
+            <a:r>
+              <a:rPr sz="1300" b="1" i="0" spc="156">
+                <a:solidFill>
+                  <a:srgbClr val="1D6B8F"/>
+                </a:solidFill>
+                <a:latin typeface="Verdana"/>
+              </a:rPr>
+              <a:t>LE TROISIÈME MODE</a:t>
+            </a:r>
+          </a:p>
+        </p:txBody>
+      </p:sp>
+      <p:sp>
+        <p:nvSpPr>
+          <p:cNvPr id="6" name="TextBox 5"/>
+          <p:cNvSpPr txBox="1"/>
+          <p:nvPr/>
+        </p:nvSpPr>
+        <p:spPr>
+          <a:xfrm>
+            <a:off x="566928" y="749808"/>
+            <a:ext cx="11057839" cy="877824"/>
+          </a:xfrm>
+          <a:prstGeom prst="rect">
+            <a:avLst/>
+          </a:prstGeom>
+          <a:noFill/>
+        </p:spPr>
+        <p:txBody>
+          <a:bodyPr wrap="square" lIns="0" rIns="0" tIns="0" bIns="0" anchor="t">
+            <a:spAutoFit/>
+          </a:bodyPr>
+          <a:lstStyle/>
+          <a:p>
+            <a:pPr algn="l">
+              <a:lnSpc>
+                <a:spcPct val="115000"/>
+              </a:lnSpc>
+            </a:pPr>
+            <a:r>
+              <a:rPr sz="3400" b="1" i="0">
+                <a:solidFill>
+                  <a:srgbClr val="17181A"/>
+                </a:solidFill>
+                <a:latin typeface="Verdana"/>
+              </a:rPr>
+              <a:t>Ce que l'élève voit en entrant</a:t>
+            </a:r>
+          </a:p>
+        </p:txBody>
+      </p:sp>
+      <p:sp>
+        <p:nvSpPr>
+          <p:cNvPr id="7" name="TextBox 6"/>
+          <p:cNvSpPr txBox="1"/>
+          <p:nvPr/>
+        </p:nvSpPr>
+        <p:spPr>
+          <a:xfrm>
+            <a:off x="566928" y="1645920"/>
+            <a:ext cx="11057839" cy="617220"/>
+          </a:xfrm>
+          <a:prstGeom prst="rect">
+            <a:avLst/>
+          </a:prstGeom>
+          <a:noFill/>
+        </p:spPr>
+        <p:txBody>
+          <a:bodyPr wrap="square" lIns="0" rIns="0" tIns="0" bIns="0" anchor="t">
+            <a:spAutoFit/>
+          </a:bodyPr>
+          <a:lstStyle/>
+          <a:p>
+            <a:pPr algn="l">
+              <a:lnSpc>
+                <a:spcPct val="135000"/>
+              </a:lnSpc>
+            </a:pPr>
+            <a:r>
+              <a:rPr sz="1800" b="0" i="0">
+                <a:solidFill>
+                  <a:srgbClr val="6E7175"/>
+                </a:solidFill>
+                <a:latin typeface="Verdana"/>
+              </a:rPr>
+              <a:t>Un code à six caractères, pris sur une feuille photocopiée. Ni compte, ni pseudonyme, ni trace qui lui survive à la soirée.</a:t>
+            </a:r>
+          </a:p>
+        </p:txBody>
+      </p:sp>
+      <p:sp>
+        <p:nvSpPr>
+          <p:cNvPr id="8" name="Rounded Rectangle 7"/>
+          <p:cNvSpPr/>
+          <p:nvPr/>
+        </p:nvSpPr>
+        <p:spPr>
+          <a:xfrm>
+            <a:off x="4196181" y="2372868"/>
+            <a:ext cx="3799332" cy="3799332"/>
+          </a:xfrm>
+          <a:prstGeom prst="roundRect">
+            <a:avLst>
+              <a:gd name="adj" fmla="val 2406"/>
+            </a:avLst>
+          </a:prstGeom>
+          <a:solidFill>
+            <a:srgbClr val="FFFFFF"/>
+          </a:solidFill>
+          <a:ln w="12700">
+            <a:solidFill>
+              <a:srgbClr val="D6D6D2"/>
+            </a:solidFill>
+          </a:ln>
+          <a:effectLst/>
+        </p:spPr>
+        <p:style>
+          <a:lnRef idx="1">
+            <a:schemeClr val="accent1"/>
+          </a:lnRef>
+          <a:fillRef idx="3">
+            <a:schemeClr val="accent1"/>
+          </a:fillRef>
+          <a:effectRef idx="2">
+            <a:schemeClr val="accent1"/>
+          </a:effectRef>
+          <a:fontRef idx="minor">
+            <a:schemeClr val="lt1"/>
+          </a:fontRef>
+        </p:style>
+        <p:txBody>
+          <a:bodyPr rtlCol="0" anchor="ctr"/>
+          <a:lstStyle/>
+          <a:p/>
+        </p:txBody>
+      </p:sp>
+      <p:pic>
+        <p:nvPicPr>
+          <p:cNvPr id="9" name="Picture 8" descr="cas-06-entree-seance.png"/>
+          <p:cNvPicPr>
+            <a:picLocks noChangeAspect="1"/>
+          </p:cNvPicPr>
+          <p:nvPr/>
+        </p:nvPicPr>
+        <p:blipFill>
+          <a:blip r:embed="rId2"/>
+          <a:stretch>
+            <a:fillRect/>
+          </a:stretch>
+        </p:blipFill>
+        <p:spPr>
+          <a:xfrm>
+            <a:off x="4214469" y="2391156"/>
+            <a:ext cx="3762756" cy="3762756"/>
+          </a:xfrm>
+          <a:prstGeom prst="rect">
+            <a:avLst/>
+          </a:prstGeom>
+        </p:spPr>
+      </p:pic>
+    </p:spTree>
+  </p:cSld>
+  <p:clrMapOvr>
+    <a:masterClrMapping/>
+  </p:clrMapOvr>
+</p:sld>
+</file>
+
+<file path=ppt/slides/slide13.xml><?xml version="1.0" encoding="utf-8"?>
+<p:sld xmlns:a="http://schemas.openxmlformats.org/drawingml/2006/main" xmlns:p="http://schemas.openxmlformats.org/presentationml/2006/main" xmlns:r="http://schemas.openxmlformats.org/officeDocument/2006/relationships">
+  <p:cSld>
+    <p:spTree>
+      <p:nvGrpSpPr>
+        <p:cNvPr id="1" name=""/>
+        <p:cNvGrpSpPr/>
+        <p:nvPr/>
+      </p:nvGrpSpPr>
+      <p:grpSpPr/>
+      <p:sp>
+        <p:nvSpPr>
+          <p:cNvPr id="2" name="Rectangle 1"/>
+          <p:cNvSpPr/>
+          <p:nvPr/>
+        </p:nvSpPr>
+        <p:spPr>
+          <a:xfrm>
+            <a:off x="0" y="0"/>
+            <a:ext cx="12191695" cy="6858000"/>
+          </a:xfrm>
+          <a:prstGeom prst="rect">
+            <a:avLst/>
+          </a:prstGeom>
+          <a:solidFill>
+            <a:srgbClr val="F7F7F5"/>
+          </a:solidFill>
+          <a:ln>
+            <a:noFill/>
+          </a:ln>
+          <a:effectLst/>
+        </p:spPr>
+        <p:style>
+          <a:lnRef idx="1">
+            <a:schemeClr val="accent1"/>
+          </a:lnRef>
+          <a:fillRef idx="3">
+            <a:schemeClr val="accent1"/>
+          </a:fillRef>
+          <a:effectRef idx="2">
+            <a:schemeClr val="accent1"/>
+          </a:effectRef>
+          <a:fontRef idx="minor">
+            <a:schemeClr val="lt1"/>
+          </a:fontRef>
+        </p:style>
+        <p:txBody>
+          <a:bodyPr rtlCol="0" anchor="ctr"/>
+          <a:lstStyle/>
+          <a:p/>
+        </p:txBody>
+      </p:sp>
+      <p:sp>
+        <p:nvSpPr>
+          <p:cNvPr id="3" name="TextBox 2"/>
+          <p:cNvSpPr txBox="1"/>
+          <p:nvPr/>
+        </p:nvSpPr>
+        <p:spPr>
+          <a:xfrm>
+            <a:off x="566928" y="6355080"/>
+            <a:ext cx="6400800" cy="219456"/>
+          </a:xfrm>
+          <a:prstGeom prst="rect">
+            <a:avLst/>
+          </a:prstGeom>
+          <a:noFill/>
+        </p:spPr>
+        <p:txBody>
+          <a:bodyPr wrap="square" lIns="0" rIns="0" tIns="0" bIns="0" anchor="t">
+            <a:spAutoFit/>
+          </a:bodyPr>
+          <a:lstStyle/>
+          <a:p>
+            <a:pPr algn="l">
+              <a:lnSpc>
+                <a:spcPct val="135000"/>
+              </a:lnSpc>
+            </a:pPr>
+            <a:r>
+              <a:rPr sz="1200" b="0" i="0">
+                <a:solidFill>
+                  <a:srgbClr val="6E7175"/>
+                </a:solidFill>
+                <a:latin typeface="Verdana"/>
+              </a:rPr>
+              <a:t>P2 · francis · présentation</a:t>
+            </a:r>
+          </a:p>
+        </p:txBody>
+      </p:sp>
+      <p:sp>
+        <p:nvSpPr>
+          <p:cNvPr id="4" name="TextBox 3"/>
+          <p:cNvSpPr txBox="1"/>
+          <p:nvPr/>
+        </p:nvSpPr>
+        <p:spPr>
+          <a:xfrm>
+            <a:off x="10710367" y="6355080"/>
+            <a:ext cx="914400" cy="219456"/>
+          </a:xfrm>
+          <a:prstGeom prst="rect">
+            <a:avLst/>
+          </a:prstGeom>
+          <a:noFill/>
+        </p:spPr>
+        <p:txBody>
+          <a:bodyPr wrap="square" lIns="0" rIns="0" tIns="0" bIns="0" anchor="t">
+            <a:spAutoFit/>
+          </a:bodyPr>
+          <a:lstStyle/>
+          <a:p>
+            <a:pPr algn="r">
+              <a:lnSpc>
+                <a:spcPct val="135000"/>
+              </a:lnSpc>
+            </a:pPr>
+            <a:r>
+              <a:rPr sz="1200" b="0" i="0">
+                <a:solidFill>
+                  <a:srgbClr val="6E7175"/>
+                </a:solidFill>
+                <a:latin typeface="Verdana"/>
+              </a:rPr>
+              <a:t>13</a:t>
+            </a:r>
+          </a:p>
+        </p:txBody>
+      </p:sp>
+      <p:sp>
+        <p:nvSpPr>
           <p:cNvPr id="5" name="Rectangle 4"/>
           <p:cNvSpPr/>
           <p:nvPr/>
@@ -8022,33 +9690,111 @@
                 </a:solidFill>
                 <a:latin typeface="Verdana"/>
               </a:rPr>
-              <a:t>L'HÉRITAGE</a:t>
-            </a:r>
-          </a:p>
-        </p:txBody>
-      </p:sp>
-      <p:sp>
-        <p:nvSpPr>
-          <p:cNvPr id="6" name="Rounded Rectangle 5"/>
+              <a:t>OÙ ILS VIVENT</a:t>
+            </a:r>
+          </a:p>
+        </p:txBody>
+      </p:sp>
+      <p:sp>
+        <p:nvSpPr>
+          <p:cNvPr id="6" name="TextBox 5"/>
+          <p:cNvSpPr txBox="1"/>
+          <p:nvPr/>
+        </p:nvSpPr>
+        <p:spPr>
+          <a:xfrm>
+            <a:off x="566928" y="749808"/>
+            <a:ext cx="11057839" cy="877824"/>
+          </a:xfrm>
+          <a:prstGeom prst="rect">
+            <a:avLst/>
+          </a:prstGeom>
+          <a:noFill/>
+        </p:spPr>
+        <p:txBody>
+          <a:bodyPr wrap="square" lIns="0" rIns="0" tIns="0" bIns="0" anchor="t">
+            <a:spAutoFit/>
+          </a:bodyPr>
+          <a:lstStyle/>
+          <a:p>
+            <a:pPr algn="l">
+              <a:lnSpc>
+                <a:spcPct val="115000"/>
+              </a:lnSpc>
+            </a:pPr>
+            <a:r>
+              <a:rPr sz="3400" b="1" i="0">
+                <a:solidFill>
+                  <a:srgbClr val="17181A"/>
+                </a:solidFill>
+                <a:latin typeface="Verdana"/>
+              </a:rPr>
+              <a:t>L'arbre des organisations</a:t>
+            </a:r>
+          </a:p>
+        </p:txBody>
+      </p:sp>
+      <p:sp>
+        <p:nvSpPr>
+          <p:cNvPr id="7" name="TextBox 6"/>
+          <p:cNvSpPr txBox="1"/>
+          <p:nvPr/>
+        </p:nvSpPr>
+        <p:spPr>
+          <a:xfrm>
+            <a:off x="566928" y="1645920"/>
+            <a:ext cx="11057839" cy="617220"/>
+          </a:xfrm>
+          <a:prstGeom prst="rect">
+            <a:avLst/>
+          </a:prstGeom>
+          <a:noFill/>
+        </p:spPr>
+        <p:txBody>
+          <a:bodyPr wrap="square" lIns="0" rIns="0" tIns="0" bIns="0" anchor="t">
+            <a:spAutoFit/>
+          </a:bodyPr>
+          <a:lstStyle/>
+          <a:p>
+            <a:pPr algn="l">
+              <a:lnSpc>
+                <a:spcPct val="135000"/>
+              </a:lnSpc>
+            </a:pPr>
+            <a:r>
+              <a:rPr sz="1800" b="0" i="0">
+                <a:solidFill>
+                  <a:srgbClr val="6E7175"/>
+                </a:solidFill>
+                <a:latin typeface="Verdana"/>
+              </a:rPr>
+              <a:t>Chaque nœud porte ses quatre réglages. Le premier réglage explicite tranche, et il descend sur tout ce qui est en dessous.</a:t>
+            </a:r>
+          </a:p>
+        </p:txBody>
+      </p:sp>
+      <p:sp>
+        <p:nvSpPr>
+          <p:cNvPr id="8" name="Rounded Rectangle 7"/>
           <p:cNvSpPr/>
           <p:nvPr/>
         </p:nvSpPr>
         <p:spPr>
           <a:xfrm>
-            <a:off x="566928" y="1225296"/>
-            <a:ext cx="11057839" cy="1967991"/>
+            <a:off x="4330386" y="2372868"/>
+            <a:ext cx="3530922" cy="3799332"/>
           </a:xfrm>
           <a:prstGeom prst="roundRect">
             <a:avLst>
-              <a:gd name="adj" fmla="val 7434"/>
+              <a:gd name="adj" fmla="val 2589"/>
             </a:avLst>
           </a:prstGeom>
           <a:solidFill>
-            <a:srgbClr val="E7F0F6"/>
+            <a:srgbClr val="FFFFFF"/>
           </a:solidFill>
           <a:ln w="12700">
             <a:solidFill>
-              <a:srgbClr val="EAEAE8"/>
+              <a:srgbClr val="D6D6D2"/>
             </a:solidFill>
           </a:ln>
           <a:effectLst/>
@@ -8073,130 +9819,30 @@
           <a:p/>
         </p:txBody>
       </p:sp>
-      <p:sp>
-        <p:nvSpPr>
-          <p:cNvPr id="7" name="TextBox 6"/>
-          <p:cNvSpPr txBox="1"/>
-          <p:nvPr/>
-        </p:nvSpPr>
-        <p:spPr>
-          <a:xfrm>
-            <a:off x="1298448" y="1682496"/>
-            <a:ext cx="9594799" cy="1145032"/>
-          </a:xfrm>
-          <a:prstGeom prst="rect">
-            <a:avLst/>
-          </a:prstGeom>
-          <a:noFill/>
-        </p:spPr>
-        <p:txBody>
-          <a:bodyPr wrap="square" lIns="0" rIns="0" tIns="0" bIns="0" anchor="t">
-            <a:spAutoFit/>
-          </a:bodyPr>
-          <a:lstStyle/>
-          <a:p>
-            <a:pPr algn="l">
-              <a:lnSpc>
-                <a:spcPct val="122000"/>
-              </a:lnSpc>
-            </a:pPr>
-            <a:r>
-              <a:rPr sz="3400" b="1" i="0">
-                <a:solidFill>
-                  <a:srgbClr val="17181A"/>
-                </a:solidFill>
-                <a:latin typeface="Verdana"/>
-              </a:rPr>
-              <a:t>Le premier réglage explicite tranche, et il descend.</a:t>
-            </a:r>
-          </a:p>
-        </p:txBody>
-      </p:sp>
-      <p:sp>
-        <p:nvSpPr>
-          <p:cNvPr id="8" name="Rounded Rectangle 7"/>
-          <p:cNvSpPr/>
-          <p:nvPr/>
-        </p:nvSpPr>
-        <p:spPr>
-          <a:xfrm>
-            <a:off x="566928" y="3467607"/>
-            <a:ext cx="11057839" cy="1671827"/>
-          </a:xfrm>
-          <a:prstGeom prst="roundRect">
-            <a:avLst>
-              <a:gd name="adj" fmla="val 8751"/>
-            </a:avLst>
-          </a:prstGeom>
-          <a:solidFill>
-            <a:srgbClr val="FFFFFF"/>
-          </a:solidFill>
-          <a:ln w="12700">
-            <a:solidFill>
-              <a:srgbClr val="EAEAE8"/>
-            </a:solidFill>
-          </a:ln>
-          <a:effectLst/>
-        </p:spPr>
-        <p:style>
-          <a:lnRef idx="1">
-            <a:schemeClr val="accent1"/>
-          </a:lnRef>
-          <a:fillRef idx="3">
-            <a:schemeClr val="accent1"/>
-          </a:fillRef>
-          <a:effectRef idx="2">
-            <a:schemeClr val="accent1"/>
-          </a:effectRef>
-          <a:fontRef idx="minor">
-            <a:schemeClr val="lt1"/>
-          </a:fontRef>
-        </p:style>
-        <p:txBody>
-          <a:bodyPr rtlCol="0" anchor="ctr"/>
-          <a:lstStyle/>
-          <a:p/>
-        </p:txBody>
-      </p:sp>
-      <p:sp>
-        <p:nvSpPr>
-          <p:cNvPr id="9" name="TextBox 8"/>
-          <p:cNvSpPr txBox="1"/>
-          <p:nvPr/>
-        </p:nvSpPr>
-        <p:spPr>
-          <a:xfrm>
-            <a:off x="969264" y="3741927"/>
-            <a:ext cx="10234879" cy="1214627"/>
-          </a:xfrm>
-          <a:prstGeom prst="rect">
-            <a:avLst/>
-          </a:prstGeom>
-          <a:noFill/>
-        </p:spPr>
-        <p:txBody>
-          <a:bodyPr wrap="square" lIns="0" rIns="0" tIns="0" bIns="0" anchor="t">
-            <a:spAutoFit/>
-          </a:bodyPr>
-          <a:lstStyle/>
-          <a:p>
-            <a:pPr algn="l">
-              <a:lnSpc>
-                <a:spcPct val="145000"/>
-              </a:lnSpc>
-            </a:pPr>
-            <a:r>
-              <a:rPr sz="2000" b="0" i="0">
-                <a:solidFill>
-                  <a:srgbClr val="4B4F52"/>
-                </a:solidFill>
-                <a:latin typeface="Verdana"/>
-              </a:rPr>
-              <a:t>« Interdit » posé sur un centre de services ferme ses douze centres. Celui qui a négocié une exception la porte écrite sur lui-même. Et un réglage absent ne ferme rien : une mise en service n'éteint jamais rien au passage.</a:t>
-            </a:r>
-          </a:p>
-        </p:txBody>
-      </p:sp>
+      <p:pic>
+        <p:nvPicPr>
+          <p:cNvPr id="9" name="Picture 8" descr="cas-11-arbre-tout-ouvert.png"/>
+          <p:cNvPicPr>
+            <a:picLocks noChangeAspect="1"/>
+          </p:cNvPicPr>
+          <p:nvPr/>
+        </p:nvPicPr>
+        <p:blipFill>
+          <a:blip r:embed="rId2"/>
+          <a:stretch>
+            <a:fillRect/>
+          </a:stretch>
+        </p:blipFill>
+        <p:spPr>
+          <a:xfrm>
+            <a:off x="4348674" y="2391156"/>
+            <a:ext cx="3494346" cy="3762756"/>
+          </a:xfrm>
+          <a:prstGeom prst="rect">
+            <a:avLst/>
+          </a:prstGeom>
+        </p:spPr>
+      </p:pic>
     </p:spTree>
   </p:cSld>
   <p:clrMapOvr>
@@ -8369,21 +10015,67 @@
                 </a:solidFill>
                 <a:latin typeface="Verdana"/>
               </a:rPr>
-              <a:t>SANS ASSISTANT</a:t>
-            </a:r>
-          </a:p>
-        </p:txBody>
-      </p:sp>
-      <p:sp>
-        <p:nvSpPr>
-          <p:cNvPr id="6" name="TextBox 5"/>
+              <a:t>L'HÉRITAGE</a:t>
+            </a:r>
+          </a:p>
+        </p:txBody>
+      </p:sp>
+      <p:sp>
+        <p:nvSpPr>
+          <p:cNvPr id="6" name="Rounded Rectangle 5"/>
+          <p:cNvSpPr/>
+          <p:nvPr/>
+        </p:nvSpPr>
+        <p:spPr>
+          <a:xfrm>
+            <a:off x="566928" y="1225296"/>
+            <a:ext cx="11057839" cy="1967991"/>
+          </a:xfrm>
+          <a:prstGeom prst="roundRect">
+            <a:avLst>
+              <a:gd name="adj" fmla="val 7434"/>
+            </a:avLst>
+          </a:prstGeom>
+          <a:solidFill>
+            <a:srgbClr val="E7F0F6"/>
+          </a:solidFill>
+          <a:ln w="12700">
+            <a:solidFill>
+              <a:srgbClr val="EAEAE8"/>
+            </a:solidFill>
+          </a:ln>
+          <a:effectLst/>
+        </p:spPr>
+        <p:style>
+          <a:lnRef idx="1">
+            <a:schemeClr val="accent1"/>
+          </a:lnRef>
+          <a:fillRef idx="3">
+            <a:schemeClr val="accent1"/>
+          </a:fillRef>
+          <a:effectRef idx="2">
+            <a:schemeClr val="accent1"/>
+          </a:effectRef>
+          <a:fontRef idx="minor">
+            <a:schemeClr val="lt1"/>
+          </a:fontRef>
+        </p:style>
+        <p:txBody>
+          <a:bodyPr rtlCol="0" anchor="ctr"/>
+          <a:lstStyle/>
+          <a:p/>
+        </p:txBody>
+      </p:sp>
+      <p:sp>
+        <p:nvSpPr>
+          <p:cNvPr id="7" name="TextBox 6"/>
           <p:cNvSpPr txBox="1"/>
           <p:nvPr/>
         </p:nvSpPr>
         <p:spPr>
           <a:xfrm>
-            <a:off x="566928" y="749808"/>
-            <a:ext cx="11057839" cy="877824"/>
+            <a:off x="1298448" y="1682496"/>
+            <a:ext cx="9594799" cy="1145032"/>
           </a:xfrm>
           <a:prstGeom prst="rect">
             <a:avLst/>
@@ -8398,7 +10090,7 @@
           <a:p>
             <a:pPr algn="l">
               <a:lnSpc>
-                <a:spcPct val="115000"/>
+                <a:spcPct val="122000"/>
               </a:lnSpc>
             </a:pPr>
             <a:r>
@@ -8408,25 +10100,25 @@
                 </a:solidFill>
                 <a:latin typeface="Verdana"/>
               </a:rPr>
-              <a:t>Ce qui tombe, et ce qui ne bouge pas</a:t>
-            </a:r>
-          </a:p>
-        </p:txBody>
-      </p:sp>
-      <p:sp>
-        <p:nvSpPr>
-          <p:cNvPr id="7" name="Rounded Rectangle 6"/>
+              <a:t>Le premier réglage explicite tranche, et il descend.</a:t>
+            </a:r>
+          </a:p>
+        </p:txBody>
+      </p:sp>
+      <p:sp>
+        <p:nvSpPr>
+          <p:cNvPr id="8" name="Rounded Rectangle 7"/>
           <p:cNvSpPr/>
           <p:nvPr/>
         </p:nvSpPr>
         <p:spPr>
           <a:xfrm>
-            <a:off x="566928" y="1810512"/>
-            <a:ext cx="5446623" cy="2052828"/>
+            <a:off x="566928" y="3467607"/>
+            <a:ext cx="11057839" cy="1671827"/>
           </a:xfrm>
           <a:prstGeom prst="roundRect">
             <a:avLst>
-              <a:gd name="adj" fmla="val 7126"/>
+              <a:gd name="adj" fmla="val 8751"/>
             </a:avLst>
           </a:prstGeom>
           <a:solidFill>
@@ -8461,14 +10153,14 @@
       </p:sp>
       <p:sp>
         <p:nvSpPr>
-          <p:cNvPr id="8" name="TextBox 7"/>
+          <p:cNvPr id="9" name="TextBox 8"/>
           <p:cNvSpPr txBox="1"/>
           <p:nvPr/>
         </p:nvSpPr>
         <p:spPr>
           <a:xfrm>
-            <a:off x="886968" y="2084831"/>
-            <a:ext cx="4806543" cy="387096"/>
+            <a:off x="969264" y="3741927"/>
+            <a:ext cx="10234879" cy="1214627"/>
           </a:xfrm>
           <a:prstGeom prst="rect">
             <a:avLst/>
@@ -8483,428 +10175,17 @@
           <a:p>
             <a:pPr algn="l">
               <a:lnSpc>
-                <a:spcPct val="118000"/>
+                <a:spcPct val="145000"/>
               </a:lnSpc>
             </a:pPr>
             <a:r>
-              <a:rPr sz="2400" b="1" i="0">
-                <a:solidFill>
-                  <a:srgbClr val="1D6B8F"/>
+              <a:rPr sz="2000" b="0" i="0">
+                <a:solidFill>
+                  <a:srgbClr val="4B4F52"/>
                 </a:solidFill>
                 <a:latin typeface="Verdana"/>
               </a:rPr>
-              <a:t>Ce qui tombe</a:t>
-            </a:r>
-          </a:p>
-        </p:txBody>
-      </p:sp>
-      <p:sp>
-        <p:nvSpPr>
-          <p:cNvPr id="9" name="TextBox 8"/>
-          <p:cNvSpPr txBox="1"/>
-          <p:nvPr/>
-        </p:nvSpPr>
-        <p:spPr>
-          <a:xfrm>
-            <a:off x="886968" y="2499360"/>
-            <a:ext cx="4806543" cy="1089660"/>
-          </a:xfrm>
-          <a:prstGeom prst="rect">
-            <a:avLst/>
-          </a:prstGeom>
-          <a:noFill/>
-        </p:spPr>
-        <p:txBody>
-          <a:bodyPr wrap="square" lIns="0" rIns="0" tIns="0" bIns="0" anchor="t">
-            <a:spAutoFit/>
-          </a:bodyPr>
-          <a:lstStyle/>
-          <a:p>
-            <a:pPr algn="l">
-              <a:lnSpc>
-                <a:spcPct val="142000"/>
-              </a:lnSpc>
-            </a:pPr>
-            <a:r>
-              <a:rPr sz="1500" b="0" i="0">
-                <a:solidFill>
-                  <a:srgbClr val="3A3D40"/>
-                </a:solidFill>
-                <a:latin typeface="Verdana"/>
-              </a:rPr>
-              <a:t>La barre d'outils de l'élève en entier — traduire, simplifier, demander. La correction avant l'envoi. « Pourquoi je me trompe ? ».</a:t>
-            </a:r>
-          </a:p>
-        </p:txBody>
-      </p:sp>
-      <p:sp>
-        <p:nvSpPr>
-          <p:cNvPr id="10" name="Rounded Rectangle 9"/>
-          <p:cNvSpPr/>
-          <p:nvPr/>
-        </p:nvSpPr>
-        <p:spPr>
-          <a:xfrm>
-            <a:off x="6178143" y="1810512"/>
-            <a:ext cx="5446623" cy="2052828"/>
-          </a:xfrm>
-          <a:prstGeom prst="roundRect">
-            <a:avLst>
-              <a:gd name="adj" fmla="val 7126"/>
-            </a:avLst>
-          </a:prstGeom>
-          <a:solidFill>
-            <a:srgbClr val="FFFFFF"/>
-          </a:solidFill>
-          <a:ln w="12700">
-            <a:solidFill>
-              <a:srgbClr val="EAEAE8"/>
-            </a:solidFill>
-          </a:ln>
-          <a:effectLst/>
-        </p:spPr>
-        <p:style>
-          <a:lnRef idx="1">
-            <a:schemeClr val="accent1"/>
-          </a:lnRef>
-          <a:fillRef idx="3">
-            <a:schemeClr val="accent1"/>
-          </a:fillRef>
-          <a:effectRef idx="2">
-            <a:schemeClr val="accent1"/>
-          </a:effectRef>
-          <a:fontRef idx="minor">
-            <a:schemeClr val="lt1"/>
-          </a:fontRef>
-        </p:style>
-        <p:txBody>
-          <a:bodyPr rtlCol="0" anchor="ctr"/>
-          <a:lstStyle/>
-          <a:p/>
-        </p:txBody>
-      </p:sp>
-      <p:sp>
-        <p:nvSpPr>
-          <p:cNvPr id="11" name="TextBox 10"/>
-          <p:cNvSpPr txBox="1"/>
-          <p:nvPr/>
-        </p:nvSpPr>
-        <p:spPr>
-          <a:xfrm>
-            <a:off x="6498183" y="2084831"/>
-            <a:ext cx="4806543" cy="387096"/>
-          </a:xfrm>
-          <a:prstGeom prst="rect">
-            <a:avLst/>
-          </a:prstGeom>
-          <a:noFill/>
-        </p:spPr>
-        <p:txBody>
-          <a:bodyPr wrap="square" lIns="0" rIns="0" tIns="0" bIns="0" anchor="t">
-            <a:spAutoFit/>
-          </a:bodyPr>
-          <a:lstStyle/>
-          <a:p>
-            <a:pPr algn="l">
-              <a:lnSpc>
-                <a:spcPct val="118000"/>
-              </a:lnSpc>
-            </a:pPr>
-            <a:r>
-              <a:rPr sz="2400" b="1" i="0">
-                <a:solidFill>
-                  <a:srgbClr val="1D6B8F"/>
-                </a:solidFill>
-                <a:latin typeface="Verdana"/>
-              </a:rPr>
-              <a:t>Ce qui reste</a:t>
-            </a:r>
-          </a:p>
-        </p:txBody>
-      </p:sp>
-      <p:sp>
-        <p:nvSpPr>
-          <p:cNvPr id="12" name="TextBox 11"/>
-          <p:cNvSpPr txBox="1"/>
-          <p:nvPr/>
-        </p:nvSpPr>
-        <p:spPr>
-          <a:xfrm>
-            <a:off x="6498183" y="2499360"/>
-            <a:ext cx="4806543" cy="1089660"/>
-          </a:xfrm>
-          <a:prstGeom prst="rect">
-            <a:avLst/>
-          </a:prstGeom>
-          <a:noFill/>
-        </p:spPr>
-        <p:txBody>
-          <a:bodyPr wrap="square" lIns="0" rIns="0" tIns="0" bIns="0" anchor="t">
-            <a:spAutoFit/>
-          </a:bodyPr>
-          <a:lstStyle/>
-          <a:p>
-            <a:pPr algn="l">
-              <a:lnSpc>
-                <a:spcPct val="142000"/>
-              </a:lnSpc>
-            </a:pPr>
-            <a:r>
-              <a:rPr sz="1500" b="0" i="0">
-                <a:solidFill>
-                  <a:srgbClr val="3A3D40"/>
-                </a:solidFill>
-                <a:latin typeface="Verdana"/>
-              </a:rPr>
-              <a:t>Les dialogues enregistrés, les sept familles d' exercices corrigés sur l'appareil, les mini-leçons, le vocabulaire, la production orale et écrite.</a:t>
-            </a:r>
-          </a:p>
-        </p:txBody>
-      </p:sp>
-      <p:sp>
-        <p:nvSpPr>
-          <p:cNvPr id="13" name="Rounded Rectangle 12"/>
-          <p:cNvSpPr/>
-          <p:nvPr/>
-        </p:nvSpPr>
-        <p:spPr>
-          <a:xfrm>
-            <a:off x="566928" y="4027932"/>
-            <a:ext cx="5446623" cy="2052828"/>
-          </a:xfrm>
-          <a:prstGeom prst="roundRect">
-            <a:avLst>
-              <a:gd name="adj" fmla="val 7126"/>
-            </a:avLst>
-          </a:prstGeom>
-          <a:solidFill>
-            <a:srgbClr val="FFFFFF"/>
-          </a:solidFill>
-          <a:ln w="12700">
-            <a:solidFill>
-              <a:srgbClr val="EAEAE8"/>
-            </a:solidFill>
-          </a:ln>
-          <a:effectLst/>
-        </p:spPr>
-        <p:style>
-          <a:lnRef idx="1">
-            <a:schemeClr val="accent1"/>
-          </a:lnRef>
-          <a:fillRef idx="3">
-            <a:schemeClr val="accent1"/>
-          </a:fillRef>
-          <a:effectRef idx="2">
-            <a:schemeClr val="accent1"/>
-          </a:effectRef>
-          <a:fontRef idx="minor">
-            <a:schemeClr val="lt1"/>
-          </a:fontRef>
-        </p:style>
-        <p:txBody>
-          <a:bodyPr rtlCol="0" anchor="ctr"/>
-          <a:lstStyle/>
-          <a:p/>
-        </p:txBody>
-      </p:sp>
-      <p:sp>
-        <p:nvSpPr>
-          <p:cNvPr id="14" name="TextBox 13"/>
-          <p:cNvSpPr txBox="1"/>
-          <p:nvPr/>
-        </p:nvSpPr>
-        <p:spPr>
-          <a:xfrm>
-            <a:off x="886968" y="4302252"/>
-            <a:ext cx="4806543" cy="387096"/>
-          </a:xfrm>
-          <a:prstGeom prst="rect">
-            <a:avLst/>
-          </a:prstGeom>
-          <a:noFill/>
-        </p:spPr>
-        <p:txBody>
-          <a:bodyPr wrap="square" lIns="0" rIns="0" tIns="0" bIns="0" anchor="t">
-            <a:spAutoFit/>
-          </a:bodyPr>
-          <a:lstStyle/>
-          <a:p>
-            <a:pPr algn="l">
-              <a:lnSpc>
-                <a:spcPct val="118000"/>
-              </a:lnSpc>
-            </a:pPr>
-            <a:r>
-              <a:rPr sz="2400" b="1" i="0">
-                <a:solidFill>
-                  <a:srgbClr val="1D6B8F"/>
-                </a:solidFill>
-                <a:latin typeface="Verdana"/>
-              </a:rPr>
-              <a:t>Pour l'élève</a:t>
-            </a:r>
-          </a:p>
-        </p:txBody>
-      </p:sp>
-      <p:sp>
-        <p:nvSpPr>
-          <p:cNvPr id="15" name="TextBox 14"/>
-          <p:cNvSpPr txBox="1"/>
-          <p:nvPr/>
-        </p:nvSpPr>
-        <p:spPr>
-          <a:xfrm>
-            <a:off x="886968" y="4716780"/>
-            <a:ext cx="4806543" cy="1089660"/>
-          </a:xfrm>
-          <a:prstGeom prst="rect">
-            <a:avLst/>
-          </a:prstGeom>
-          <a:noFill/>
-        </p:spPr>
-        <p:txBody>
-          <a:bodyPr wrap="square" lIns="0" rIns="0" tIns="0" bIns="0" anchor="t">
-            <a:spAutoFit/>
-          </a:bodyPr>
-          <a:lstStyle/>
-          <a:p>
-            <a:pPr algn="l">
-              <a:lnSpc>
-                <a:spcPct val="142000"/>
-              </a:lnSpc>
-            </a:pPr>
-            <a:r>
-              <a:rPr sz="1500" b="0" i="0">
-                <a:solidFill>
-                  <a:srgbClr val="3A3D40"/>
-                </a:solidFill>
-                <a:latin typeface="Verdana"/>
-              </a:rPr>
-              <a:t>La réponse attendue s'affiche après deux essais : il n'est jamais laissé devant un mur.</a:t>
-            </a:r>
-          </a:p>
-        </p:txBody>
-      </p:sp>
-      <p:sp>
-        <p:nvSpPr>
-          <p:cNvPr id="16" name="Rounded Rectangle 15"/>
-          <p:cNvSpPr/>
-          <p:nvPr/>
-        </p:nvSpPr>
-        <p:spPr>
-          <a:xfrm>
-            <a:off x="6178143" y="4027932"/>
-            <a:ext cx="5446623" cy="2052828"/>
-          </a:xfrm>
-          <a:prstGeom prst="roundRect">
-            <a:avLst>
-              <a:gd name="adj" fmla="val 7126"/>
-            </a:avLst>
-          </a:prstGeom>
-          <a:solidFill>
-            <a:srgbClr val="FFFFFF"/>
-          </a:solidFill>
-          <a:ln w="12700">
-            <a:solidFill>
-              <a:srgbClr val="EAEAE8"/>
-            </a:solidFill>
-          </a:ln>
-          <a:effectLst/>
-        </p:spPr>
-        <p:style>
-          <a:lnRef idx="1">
-            <a:schemeClr val="accent1"/>
-          </a:lnRef>
-          <a:fillRef idx="3">
-            <a:schemeClr val="accent1"/>
-          </a:fillRef>
-          <a:effectRef idx="2">
-            <a:schemeClr val="accent1"/>
-          </a:effectRef>
-          <a:fontRef idx="minor">
-            <a:schemeClr val="lt1"/>
-          </a:fontRef>
-        </p:style>
-        <p:txBody>
-          <a:bodyPr rtlCol="0" anchor="ctr"/>
-          <a:lstStyle/>
-          <a:p/>
-        </p:txBody>
-      </p:sp>
-      <p:sp>
-        <p:nvSpPr>
-          <p:cNvPr id="17" name="TextBox 16"/>
-          <p:cNvSpPr txBox="1"/>
-          <p:nvPr/>
-        </p:nvSpPr>
-        <p:spPr>
-          <a:xfrm>
-            <a:off x="6498183" y="4302252"/>
-            <a:ext cx="4806543" cy="387096"/>
-          </a:xfrm>
-          <a:prstGeom prst="rect">
-            <a:avLst/>
-          </a:prstGeom>
-          <a:noFill/>
-        </p:spPr>
-        <p:txBody>
-          <a:bodyPr wrap="square" lIns="0" rIns="0" tIns="0" bIns="0" anchor="t">
-            <a:spAutoFit/>
-          </a:bodyPr>
-          <a:lstStyle/>
-          <a:p>
-            <a:pPr algn="l">
-              <a:lnSpc>
-                <a:spcPct val="118000"/>
-              </a:lnSpc>
-            </a:pPr>
-            <a:r>
-              <a:rPr sz="2400" b="1" i="0">
-                <a:solidFill>
-                  <a:srgbClr val="1D6B8F"/>
-                </a:solidFill>
-                <a:latin typeface="Verdana"/>
-              </a:rPr>
-              <a:t>Pour l'enseignant</a:t>
-            </a:r>
-          </a:p>
-        </p:txBody>
-      </p:sp>
-      <p:sp>
-        <p:nvSpPr>
-          <p:cNvPr id="18" name="TextBox 17"/>
-          <p:cNvSpPr txBox="1"/>
-          <p:nvPr/>
-        </p:nvSpPr>
-        <p:spPr>
-          <a:xfrm>
-            <a:off x="6498183" y="4716780"/>
-            <a:ext cx="4806543" cy="1089660"/>
-          </a:xfrm>
-          <a:prstGeom prst="rect">
-            <a:avLst/>
-          </a:prstGeom>
-          <a:noFill/>
-        </p:spPr>
-        <p:txBody>
-          <a:bodyPr wrap="square" lIns="0" rIns="0" tIns="0" bIns="0" anchor="t">
-            <a:spAutoFit/>
-          </a:bodyPr>
-          <a:lstStyle/>
-          <a:p>
-            <a:pPr algn="l">
-              <a:lnSpc>
-                <a:spcPct val="142000"/>
-              </a:lnSpc>
-            </a:pPr>
-            <a:r>
-              <a:rPr sz="1500" b="0" i="0">
-                <a:solidFill>
-                  <a:srgbClr val="3A3D40"/>
-                </a:solidFill>
-                <a:latin typeface="Verdana"/>
-              </a:rPr>
-              <a:t>Les textes arrivent non corrigés. C'est lui qui corrige — c'est le vrai coût du refus, et il se voit.</a:t>
+              <a:t>« Interdit » posé sur un centre de services ferme ses douze centres. Celui qui a négocié une exception la porte écrite sur lui-même. Et un réglage absent ne ferme rien : une mise en service n'éteint jamais rien au passage.</a:t>
             </a:r>
           </a:p>
         </p:txBody>
@@ -9081,7 +10362,7 @@
                 </a:solidFill>
                 <a:latin typeface="Verdana"/>
               </a:rPr>
-              <a:t>LE MALENTENDU LE PLUS FRÉQUENT</a:t>
+              <a:t>SANS ASSISTANT</a:t>
             </a:r>
           </a:p>
         </p:txBody>
@@ -9120,7 +10401,7 @@
                 </a:solidFill>
                 <a:latin typeface="Verdana"/>
               </a:rPr>
-              <a:t>Le piège le plus fréquent</a:t>
+              <a:t>Ce qui tombe, et ce qui ne bouge pas</a:t>
             </a:r>
           </a:p>
         </p:txBody>
@@ -9133,260 +10414,12 @@
         </p:nvSpPr>
         <p:spPr>
           <a:xfrm>
-            <a:off x="566928" y="1856232"/>
-            <a:ext cx="5428335" cy="2331720"/>
+            <a:off x="566928" y="1810512"/>
+            <a:ext cx="5446623" cy="2052828"/>
           </a:xfrm>
           <a:prstGeom prst="roundRect">
             <a:avLst>
-              <a:gd name="adj" fmla="val 6274"/>
-            </a:avLst>
-          </a:prstGeom>
-          <a:solidFill>
-            <a:srgbClr val="FFF6F5"/>
-          </a:solidFill>
-          <a:ln w="12700">
-            <a:solidFill>
-              <a:srgbClr val="DC2626"/>
-            </a:solidFill>
-          </a:ln>
-          <a:effectLst/>
-        </p:spPr>
-        <p:style>
-          <a:lnRef idx="1">
-            <a:schemeClr val="accent1"/>
-          </a:lnRef>
-          <a:fillRef idx="3">
-            <a:schemeClr val="accent1"/>
-          </a:fillRef>
-          <a:effectRef idx="2">
-            <a:schemeClr val="accent1"/>
-          </a:effectRef>
-          <a:fontRef idx="minor">
-            <a:schemeClr val="lt1"/>
-          </a:fontRef>
-        </p:style>
-        <p:txBody>
-          <a:bodyPr rtlCol="0" anchor="ctr"/>
-          <a:lstStyle/>
-          <a:p/>
-        </p:txBody>
-      </p:sp>
-      <p:sp>
-        <p:nvSpPr>
-          <p:cNvPr id="8" name="TextBox 7"/>
-          <p:cNvSpPr txBox="1"/>
-          <p:nvPr/>
-        </p:nvSpPr>
-        <p:spPr>
-          <a:xfrm>
-            <a:off x="932688" y="2130552"/>
-            <a:ext cx="4696815" cy="274320"/>
-          </a:xfrm>
-          <a:prstGeom prst="rect">
-            <a:avLst/>
-          </a:prstGeom>
-          <a:noFill/>
-        </p:spPr>
-        <p:txBody>
-          <a:bodyPr wrap="square" lIns="0" rIns="0" tIns="0" bIns="0" anchor="t">
-            <a:spAutoFit/>
-          </a:bodyPr>
-          <a:lstStyle/>
-          <a:p>
-            <a:pPr algn="l">
-              <a:lnSpc>
-                <a:spcPct val="135000"/>
-              </a:lnSpc>
-            </a:pPr>
-            <a:r>
-              <a:rPr sz="1300" b="1" i="0" spc="156">
-                <a:solidFill>
-                  <a:srgbClr val="B91C1C"/>
-                </a:solidFill>
-                <a:latin typeface="Verdana"/>
-              </a:rPr>
-              <a:t>ON ENTEND SOUVENT</a:t>
-            </a:r>
-          </a:p>
-        </p:txBody>
-      </p:sp>
-      <p:sp>
-        <p:nvSpPr>
-          <p:cNvPr id="9" name="TextBox 8"/>
-          <p:cNvSpPr txBox="1"/>
-          <p:nvPr/>
-        </p:nvSpPr>
-        <p:spPr>
-          <a:xfrm>
-            <a:off x="932688" y="2569464"/>
-            <a:ext cx="4696815" cy="1417320"/>
-          </a:xfrm>
-          <a:prstGeom prst="rect">
-            <a:avLst/>
-          </a:prstGeom>
-          <a:noFill/>
-        </p:spPr>
-        <p:txBody>
-          <a:bodyPr wrap="square" lIns="0" rIns="0" tIns="0" bIns="0" anchor="t">
-            <a:spAutoFit/>
-          </a:bodyPr>
-          <a:lstStyle/>
-          <a:p>
-            <a:pPr algn="l">
-              <a:lnSpc>
-                <a:spcPct val="130000"/>
-              </a:lnSpc>
-            </a:pPr>
-            <a:r>
-              <a:rPr sz="2500" b="1" i="0">
-                <a:solidFill>
-                  <a:srgbClr val="17181A"/>
-                </a:solidFill>
-                <a:latin typeface="Verdana"/>
-              </a:rPr>
-              <a:t>« Fermer l'assistant, c'est perdre le cours. »</a:t>
-            </a:r>
-          </a:p>
-        </p:txBody>
-      </p:sp>
-      <p:sp>
-        <p:nvSpPr>
-          <p:cNvPr id="10" name="Rounded Rectangle 9"/>
-          <p:cNvSpPr/>
-          <p:nvPr/>
-        </p:nvSpPr>
-        <p:spPr>
-          <a:xfrm>
-            <a:off x="6196431" y="1856232"/>
-            <a:ext cx="5428335" cy="2331720"/>
-          </a:xfrm>
-          <a:prstGeom prst="roundRect">
-            <a:avLst>
-              <a:gd name="adj" fmla="val 6274"/>
-            </a:avLst>
-          </a:prstGeom>
-          <a:solidFill>
-            <a:srgbClr val="E6F5EE"/>
-          </a:solidFill>
-          <a:ln w="12700">
-            <a:solidFill>
-              <a:srgbClr val="0A8F5B"/>
-            </a:solidFill>
-          </a:ln>
-          <a:effectLst/>
-        </p:spPr>
-        <p:style>
-          <a:lnRef idx="1">
-            <a:schemeClr val="accent1"/>
-          </a:lnRef>
-          <a:fillRef idx="3">
-            <a:schemeClr val="accent1"/>
-          </a:fillRef>
-          <a:effectRef idx="2">
-            <a:schemeClr val="accent1"/>
-          </a:effectRef>
-          <a:fontRef idx="minor">
-            <a:schemeClr val="lt1"/>
-          </a:fontRef>
-        </p:style>
-        <p:txBody>
-          <a:bodyPr rtlCol="0" anchor="ctr"/>
-          <a:lstStyle/>
-          <a:p/>
-        </p:txBody>
-      </p:sp>
-      <p:sp>
-        <p:nvSpPr>
-          <p:cNvPr id="11" name="TextBox 10"/>
-          <p:cNvSpPr txBox="1"/>
-          <p:nvPr/>
-        </p:nvSpPr>
-        <p:spPr>
-          <a:xfrm>
-            <a:off x="6562191" y="2130552"/>
-            <a:ext cx="4696815" cy="274320"/>
-          </a:xfrm>
-          <a:prstGeom prst="rect">
-            <a:avLst/>
-          </a:prstGeom>
-          <a:noFill/>
-        </p:spPr>
-        <p:txBody>
-          <a:bodyPr wrap="square" lIns="0" rIns="0" tIns="0" bIns="0" anchor="t">
-            <a:spAutoFit/>
-          </a:bodyPr>
-          <a:lstStyle/>
-          <a:p>
-            <a:pPr algn="l">
-              <a:lnSpc>
-                <a:spcPct val="135000"/>
-              </a:lnSpc>
-            </a:pPr>
-            <a:r>
-              <a:rPr sz="1300" b="1" i="0" spc="156">
-                <a:solidFill>
-                  <a:srgbClr val="07734A"/>
-                </a:solidFill>
-                <a:latin typeface="Verdana"/>
-              </a:rPr>
-              <a:t>IL FAUT DIRE PLUTÔT</a:t>
-            </a:r>
-          </a:p>
-        </p:txBody>
-      </p:sp>
-      <p:sp>
-        <p:nvSpPr>
-          <p:cNvPr id="12" name="TextBox 11"/>
-          <p:cNvSpPr txBox="1"/>
-          <p:nvPr/>
-        </p:nvSpPr>
-        <p:spPr>
-          <a:xfrm>
-            <a:off x="6562191" y="2569464"/>
-            <a:ext cx="4696815" cy="1417320"/>
-          </a:xfrm>
-          <a:prstGeom prst="rect">
-            <a:avLst/>
-          </a:prstGeom>
-          <a:noFill/>
-        </p:spPr>
-        <p:txBody>
-          <a:bodyPr wrap="square" lIns="0" rIns="0" tIns="0" bIns="0" anchor="t">
-            <a:spAutoFit/>
-          </a:bodyPr>
-          <a:lstStyle/>
-          <a:p>
-            <a:pPr algn="l">
-              <a:lnSpc>
-                <a:spcPct val="130000"/>
-              </a:lnSpc>
-            </a:pPr>
-            <a:r>
-              <a:rPr sz="2400" b="1" i="0">
-                <a:solidFill>
-                  <a:srgbClr val="17181A"/>
-                </a:solidFill>
-                <a:latin typeface="Verdana"/>
-              </a:rPr>
-              <a:t>« Fermer l'assistant, c'est perdre l'aide immédiate, pas le cours. »</a:t>
-            </a:r>
-          </a:p>
-        </p:txBody>
-      </p:sp>
-      <p:sp>
-        <p:nvSpPr>
-          <p:cNvPr id="13" name="Rounded Rectangle 12"/>
-          <p:cNvSpPr/>
-          <p:nvPr/>
-        </p:nvSpPr>
-        <p:spPr>
-          <a:xfrm>
-            <a:off x="566928" y="4462272"/>
-            <a:ext cx="11057839" cy="1618487"/>
-          </a:xfrm>
-          <a:prstGeom prst="roundRect">
-            <a:avLst>
-              <a:gd name="adj" fmla="val 9039"/>
+              <a:gd name="adj" fmla="val 7126"/>
             </a:avLst>
           </a:prstGeom>
           <a:solidFill>
@@ -9421,14 +10454,14 @@
       </p:sp>
       <p:sp>
         <p:nvSpPr>
-          <p:cNvPr id="14" name="TextBox 13"/>
+          <p:cNvPr id="8" name="TextBox 7"/>
           <p:cNvSpPr txBox="1"/>
           <p:nvPr/>
         </p:nvSpPr>
         <p:spPr>
           <a:xfrm>
-            <a:off x="969264" y="4736592"/>
-            <a:ext cx="10234879" cy="1150620"/>
+            <a:off x="886968" y="2084831"/>
+            <a:ext cx="4806543" cy="387096"/>
           </a:xfrm>
           <a:prstGeom prst="rect">
             <a:avLst/>
@@ -9443,17 +10476,428 @@
           <a:p>
             <a:pPr algn="l">
               <a:lnSpc>
-                <a:spcPct val="145000"/>
+                <a:spcPct val="118000"/>
               </a:lnSpc>
             </a:pPr>
             <a:r>
-              <a:rPr sz="2000" b="0" i="0">
-                <a:solidFill>
-                  <a:srgbClr val="4B4F52"/>
+              <a:rPr sz="2400" b="1" i="0">
+                <a:solidFill>
+                  <a:srgbClr val="1D6B8F"/>
                 </a:solidFill>
                 <a:latin typeface="Verdana"/>
               </a:rPr>
-              <a:t>Les 21 403 pistes audio sont enregistrées d'avance et les exercices à réponse connue se corrigent sur l'appareil : un centre sans assistant garde le matériel entier et ne paie plus rien à l'usage.</a:t>
+              <a:t>Ce qui tombe</a:t>
+            </a:r>
+          </a:p>
+        </p:txBody>
+      </p:sp>
+      <p:sp>
+        <p:nvSpPr>
+          <p:cNvPr id="9" name="TextBox 8"/>
+          <p:cNvSpPr txBox="1"/>
+          <p:nvPr/>
+        </p:nvSpPr>
+        <p:spPr>
+          <a:xfrm>
+            <a:off x="886968" y="2499360"/>
+            <a:ext cx="4806543" cy="1089660"/>
+          </a:xfrm>
+          <a:prstGeom prst="rect">
+            <a:avLst/>
+          </a:prstGeom>
+          <a:noFill/>
+        </p:spPr>
+        <p:txBody>
+          <a:bodyPr wrap="square" lIns="0" rIns="0" tIns="0" bIns="0" anchor="t">
+            <a:spAutoFit/>
+          </a:bodyPr>
+          <a:lstStyle/>
+          <a:p>
+            <a:pPr algn="l">
+              <a:lnSpc>
+                <a:spcPct val="142000"/>
+              </a:lnSpc>
+            </a:pPr>
+            <a:r>
+              <a:rPr sz="1500" b="0" i="0">
+                <a:solidFill>
+                  <a:srgbClr val="3A3D40"/>
+                </a:solidFill>
+                <a:latin typeface="Verdana"/>
+              </a:rPr>
+              <a:t>La barre d'outils de l'élève en entier — traduire, simplifier, demander. La correction avant l'envoi. « Pourquoi je me trompe ? ».</a:t>
+            </a:r>
+          </a:p>
+        </p:txBody>
+      </p:sp>
+      <p:sp>
+        <p:nvSpPr>
+          <p:cNvPr id="10" name="Rounded Rectangle 9"/>
+          <p:cNvSpPr/>
+          <p:nvPr/>
+        </p:nvSpPr>
+        <p:spPr>
+          <a:xfrm>
+            <a:off x="6178143" y="1810512"/>
+            <a:ext cx="5446623" cy="2052828"/>
+          </a:xfrm>
+          <a:prstGeom prst="roundRect">
+            <a:avLst>
+              <a:gd name="adj" fmla="val 7126"/>
+            </a:avLst>
+          </a:prstGeom>
+          <a:solidFill>
+            <a:srgbClr val="FFFFFF"/>
+          </a:solidFill>
+          <a:ln w="12700">
+            <a:solidFill>
+              <a:srgbClr val="EAEAE8"/>
+            </a:solidFill>
+          </a:ln>
+          <a:effectLst/>
+        </p:spPr>
+        <p:style>
+          <a:lnRef idx="1">
+            <a:schemeClr val="accent1"/>
+          </a:lnRef>
+          <a:fillRef idx="3">
+            <a:schemeClr val="accent1"/>
+          </a:fillRef>
+          <a:effectRef idx="2">
+            <a:schemeClr val="accent1"/>
+          </a:effectRef>
+          <a:fontRef idx="minor">
+            <a:schemeClr val="lt1"/>
+          </a:fontRef>
+        </p:style>
+        <p:txBody>
+          <a:bodyPr rtlCol="0" anchor="ctr"/>
+          <a:lstStyle/>
+          <a:p/>
+        </p:txBody>
+      </p:sp>
+      <p:sp>
+        <p:nvSpPr>
+          <p:cNvPr id="11" name="TextBox 10"/>
+          <p:cNvSpPr txBox="1"/>
+          <p:nvPr/>
+        </p:nvSpPr>
+        <p:spPr>
+          <a:xfrm>
+            <a:off x="6498183" y="2084831"/>
+            <a:ext cx="4806543" cy="387096"/>
+          </a:xfrm>
+          <a:prstGeom prst="rect">
+            <a:avLst/>
+          </a:prstGeom>
+          <a:noFill/>
+        </p:spPr>
+        <p:txBody>
+          <a:bodyPr wrap="square" lIns="0" rIns="0" tIns="0" bIns="0" anchor="t">
+            <a:spAutoFit/>
+          </a:bodyPr>
+          <a:lstStyle/>
+          <a:p>
+            <a:pPr algn="l">
+              <a:lnSpc>
+                <a:spcPct val="118000"/>
+              </a:lnSpc>
+            </a:pPr>
+            <a:r>
+              <a:rPr sz="2400" b="1" i="0">
+                <a:solidFill>
+                  <a:srgbClr val="1D6B8F"/>
+                </a:solidFill>
+                <a:latin typeface="Verdana"/>
+              </a:rPr>
+              <a:t>Ce qui reste</a:t>
+            </a:r>
+          </a:p>
+        </p:txBody>
+      </p:sp>
+      <p:sp>
+        <p:nvSpPr>
+          <p:cNvPr id="12" name="TextBox 11"/>
+          <p:cNvSpPr txBox="1"/>
+          <p:nvPr/>
+        </p:nvSpPr>
+        <p:spPr>
+          <a:xfrm>
+            <a:off x="6498183" y="2499360"/>
+            <a:ext cx="4806543" cy="1089660"/>
+          </a:xfrm>
+          <a:prstGeom prst="rect">
+            <a:avLst/>
+          </a:prstGeom>
+          <a:noFill/>
+        </p:spPr>
+        <p:txBody>
+          <a:bodyPr wrap="square" lIns="0" rIns="0" tIns="0" bIns="0" anchor="t">
+            <a:spAutoFit/>
+          </a:bodyPr>
+          <a:lstStyle/>
+          <a:p>
+            <a:pPr algn="l">
+              <a:lnSpc>
+                <a:spcPct val="142000"/>
+              </a:lnSpc>
+            </a:pPr>
+            <a:r>
+              <a:rPr sz="1500" b="0" i="0">
+                <a:solidFill>
+                  <a:srgbClr val="3A3D40"/>
+                </a:solidFill>
+                <a:latin typeface="Verdana"/>
+              </a:rPr>
+              <a:t>Les dialogues enregistrés, les sept familles d' exercices corrigés sur l'appareil, les mini-leçons, le vocabulaire, la production orale et écrite.</a:t>
+            </a:r>
+          </a:p>
+        </p:txBody>
+      </p:sp>
+      <p:sp>
+        <p:nvSpPr>
+          <p:cNvPr id="13" name="Rounded Rectangle 12"/>
+          <p:cNvSpPr/>
+          <p:nvPr/>
+        </p:nvSpPr>
+        <p:spPr>
+          <a:xfrm>
+            <a:off x="566928" y="4027932"/>
+            <a:ext cx="5446623" cy="2052828"/>
+          </a:xfrm>
+          <a:prstGeom prst="roundRect">
+            <a:avLst>
+              <a:gd name="adj" fmla="val 7126"/>
+            </a:avLst>
+          </a:prstGeom>
+          <a:solidFill>
+            <a:srgbClr val="FFFFFF"/>
+          </a:solidFill>
+          <a:ln w="12700">
+            <a:solidFill>
+              <a:srgbClr val="EAEAE8"/>
+            </a:solidFill>
+          </a:ln>
+          <a:effectLst/>
+        </p:spPr>
+        <p:style>
+          <a:lnRef idx="1">
+            <a:schemeClr val="accent1"/>
+          </a:lnRef>
+          <a:fillRef idx="3">
+            <a:schemeClr val="accent1"/>
+          </a:fillRef>
+          <a:effectRef idx="2">
+            <a:schemeClr val="accent1"/>
+          </a:effectRef>
+          <a:fontRef idx="minor">
+            <a:schemeClr val="lt1"/>
+          </a:fontRef>
+        </p:style>
+        <p:txBody>
+          <a:bodyPr rtlCol="0" anchor="ctr"/>
+          <a:lstStyle/>
+          <a:p/>
+        </p:txBody>
+      </p:sp>
+      <p:sp>
+        <p:nvSpPr>
+          <p:cNvPr id="14" name="TextBox 13"/>
+          <p:cNvSpPr txBox="1"/>
+          <p:nvPr/>
+        </p:nvSpPr>
+        <p:spPr>
+          <a:xfrm>
+            <a:off x="886968" y="4302252"/>
+            <a:ext cx="4806543" cy="387096"/>
+          </a:xfrm>
+          <a:prstGeom prst="rect">
+            <a:avLst/>
+          </a:prstGeom>
+          <a:noFill/>
+        </p:spPr>
+        <p:txBody>
+          <a:bodyPr wrap="square" lIns="0" rIns="0" tIns="0" bIns="0" anchor="t">
+            <a:spAutoFit/>
+          </a:bodyPr>
+          <a:lstStyle/>
+          <a:p>
+            <a:pPr algn="l">
+              <a:lnSpc>
+                <a:spcPct val="118000"/>
+              </a:lnSpc>
+            </a:pPr>
+            <a:r>
+              <a:rPr sz="2400" b="1" i="0">
+                <a:solidFill>
+                  <a:srgbClr val="1D6B8F"/>
+                </a:solidFill>
+                <a:latin typeface="Verdana"/>
+              </a:rPr>
+              <a:t>Pour l'élève</a:t>
+            </a:r>
+          </a:p>
+        </p:txBody>
+      </p:sp>
+      <p:sp>
+        <p:nvSpPr>
+          <p:cNvPr id="15" name="TextBox 14"/>
+          <p:cNvSpPr txBox="1"/>
+          <p:nvPr/>
+        </p:nvSpPr>
+        <p:spPr>
+          <a:xfrm>
+            <a:off x="886968" y="4716780"/>
+            <a:ext cx="4806543" cy="1089660"/>
+          </a:xfrm>
+          <a:prstGeom prst="rect">
+            <a:avLst/>
+          </a:prstGeom>
+          <a:noFill/>
+        </p:spPr>
+        <p:txBody>
+          <a:bodyPr wrap="square" lIns="0" rIns="0" tIns="0" bIns="0" anchor="t">
+            <a:spAutoFit/>
+          </a:bodyPr>
+          <a:lstStyle/>
+          <a:p>
+            <a:pPr algn="l">
+              <a:lnSpc>
+                <a:spcPct val="142000"/>
+              </a:lnSpc>
+            </a:pPr>
+            <a:r>
+              <a:rPr sz="1500" b="0" i="0">
+                <a:solidFill>
+                  <a:srgbClr val="3A3D40"/>
+                </a:solidFill>
+                <a:latin typeface="Verdana"/>
+              </a:rPr>
+              <a:t>La réponse attendue s'affiche après deux essais : il n'est jamais laissé devant un mur.</a:t>
+            </a:r>
+          </a:p>
+        </p:txBody>
+      </p:sp>
+      <p:sp>
+        <p:nvSpPr>
+          <p:cNvPr id="16" name="Rounded Rectangle 15"/>
+          <p:cNvSpPr/>
+          <p:nvPr/>
+        </p:nvSpPr>
+        <p:spPr>
+          <a:xfrm>
+            <a:off x="6178143" y="4027932"/>
+            <a:ext cx="5446623" cy="2052828"/>
+          </a:xfrm>
+          <a:prstGeom prst="roundRect">
+            <a:avLst>
+              <a:gd name="adj" fmla="val 7126"/>
+            </a:avLst>
+          </a:prstGeom>
+          <a:solidFill>
+            <a:srgbClr val="FFFFFF"/>
+          </a:solidFill>
+          <a:ln w="12700">
+            <a:solidFill>
+              <a:srgbClr val="EAEAE8"/>
+            </a:solidFill>
+          </a:ln>
+          <a:effectLst/>
+        </p:spPr>
+        <p:style>
+          <a:lnRef idx="1">
+            <a:schemeClr val="accent1"/>
+          </a:lnRef>
+          <a:fillRef idx="3">
+            <a:schemeClr val="accent1"/>
+          </a:fillRef>
+          <a:effectRef idx="2">
+            <a:schemeClr val="accent1"/>
+          </a:effectRef>
+          <a:fontRef idx="minor">
+            <a:schemeClr val="lt1"/>
+          </a:fontRef>
+        </p:style>
+        <p:txBody>
+          <a:bodyPr rtlCol="0" anchor="ctr"/>
+          <a:lstStyle/>
+          <a:p/>
+        </p:txBody>
+      </p:sp>
+      <p:sp>
+        <p:nvSpPr>
+          <p:cNvPr id="17" name="TextBox 16"/>
+          <p:cNvSpPr txBox="1"/>
+          <p:nvPr/>
+        </p:nvSpPr>
+        <p:spPr>
+          <a:xfrm>
+            <a:off x="6498183" y="4302252"/>
+            <a:ext cx="4806543" cy="387096"/>
+          </a:xfrm>
+          <a:prstGeom prst="rect">
+            <a:avLst/>
+          </a:prstGeom>
+          <a:noFill/>
+        </p:spPr>
+        <p:txBody>
+          <a:bodyPr wrap="square" lIns="0" rIns="0" tIns="0" bIns="0" anchor="t">
+            <a:spAutoFit/>
+          </a:bodyPr>
+          <a:lstStyle/>
+          <a:p>
+            <a:pPr algn="l">
+              <a:lnSpc>
+                <a:spcPct val="118000"/>
+              </a:lnSpc>
+            </a:pPr>
+            <a:r>
+              <a:rPr sz="2400" b="1" i="0">
+                <a:solidFill>
+                  <a:srgbClr val="1D6B8F"/>
+                </a:solidFill>
+                <a:latin typeface="Verdana"/>
+              </a:rPr>
+              <a:t>Pour l'enseignant</a:t>
+            </a:r>
+          </a:p>
+        </p:txBody>
+      </p:sp>
+      <p:sp>
+        <p:nvSpPr>
+          <p:cNvPr id="18" name="TextBox 17"/>
+          <p:cNvSpPr txBox="1"/>
+          <p:nvPr/>
+        </p:nvSpPr>
+        <p:spPr>
+          <a:xfrm>
+            <a:off x="6498183" y="4716780"/>
+            <a:ext cx="4806543" cy="1089660"/>
+          </a:xfrm>
+          <a:prstGeom prst="rect">
+            <a:avLst/>
+          </a:prstGeom>
+          <a:noFill/>
+        </p:spPr>
+        <p:txBody>
+          <a:bodyPr wrap="square" lIns="0" rIns="0" tIns="0" bIns="0" anchor="t">
+            <a:spAutoFit/>
+          </a:bodyPr>
+          <a:lstStyle/>
+          <a:p>
+            <a:pPr algn="l">
+              <a:lnSpc>
+                <a:spcPct val="142000"/>
+              </a:lnSpc>
+            </a:pPr>
+            <a:r>
+              <a:rPr sz="1500" b="0" i="0">
+                <a:solidFill>
+                  <a:srgbClr val="3A3D40"/>
+                </a:solidFill>
+                <a:latin typeface="Verdana"/>
+              </a:rPr>
+              <a:t>Les textes arrivent non corrigés. C'est lui qui corrige — c'est le vrai coût du refus, et il se voit.</a:t>
             </a:r>
           </a:p>
         </p:txBody>
@@ -9630,7 +11074,7 @@
                 </a:solidFill>
                 <a:latin typeface="Verdana"/>
               </a:rPr>
-              <a:t>LE TROISIÈME MODE</a:t>
+              <a:t>ASSISTANCE OUVERTE</a:t>
             </a:r>
           </a:p>
         </p:txBody>
@@ -9669,25 +11113,64 @@
                 </a:solidFill>
                 <a:latin typeface="Verdana"/>
               </a:rPr>
-              <a:t>Une classe sans compte d'élève</a:t>
-            </a:r>
-          </a:p>
-        </p:txBody>
-      </p:sp>
-      <p:sp>
-        <p:nvSpPr>
-          <p:cNvPr id="7" name="Rounded Rectangle 6"/>
+              <a:t>Ce que l'élève voit avant d'envoyer</a:t>
+            </a:r>
+          </a:p>
+        </p:txBody>
+      </p:sp>
+      <p:sp>
+        <p:nvSpPr>
+          <p:cNvPr id="7" name="TextBox 6"/>
+          <p:cNvSpPr txBox="1"/>
+          <p:nvPr/>
+        </p:nvSpPr>
+        <p:spPr>
+          <a:xfrm>
+            <a:off x="566928" y="1645920"/>
+            <a:ext cx="11057839" cy="617220"/>
+          </a:xfrm>
+          <a:prstGeom prst="rect">
+            <a:avLst/>
+          </a:prstGeom>
+          <a:noFill/>
+        </p:spPr>
+        <p:txBody>
+          <a:bodyPr wrap="square" lIns="0" rIns="0" tIns="0" bIns="0" anchor="t">
+            <a:spAutoFit/>
+          </a:bodyPr>
+          <a:lstStyle/>
+          <a:p>
+            <a:pPr algn="l">
+              <a:lnSpc>
+                <a:spcPct val="135000"/>
+              </a:lnSpc>
+            </a:pPr>
+            <a:r>
+              <a:rPr sz="1800" b="0" i="0">
+                <a:solidFill>
+                  <a:srgbClr val="6E7175"/>
+                </a:solidFill>
+                <a:latin typeface="Verdana"/>
+              </a:rPr>
+              <a:t>La relecture s'affiche à l'écran, elle n'est gardée nulle part. L'enseignant reçoit ce que l'élève décide de lui envoyer.</a:t>
+            </a:r>
+          </a:p>
+        </p:txBody>
+      </p:sp>
+      <p:sp>
+        <p:nvSpPr>
+          <p:cNvPr id="8" name="Rounded Rectangle 7"/>
           <p:cNvSpPr/>
           <p:nvPr/>
         </p:nvSpPr>
         <p:spPr>
           <a:xfrm>
-            <a:off x="566928" y="1810512"/>
-            <a:ext cx="11057839" cy="2084832"/>
+            <a:off x="5325008" y="2372868"/>
+            <a:ext cx="1541678" cy="3799332"/>
           </a:xfrm>
           <a:prstGeom prst="roundRect">
             <a:avLst>
-              <a:gd name="adj" fmla="val 7017"/>
+              <a:gd name="adj" fmla="val 5931"/>
             </a:avLst>
           </a:prstGeom>
           <a:solidFill>
@@ -9695,7 +11178,7 @@
           </a:solidFill>
           <a:ln w="12700">
             <a:solidFill>
-              <a:srgbClr val="EAEAE8"/>
+              <a:srgbClr val="D6D6D2"/>
             </a:solidFill>
           </a:ln>
           <a:effectLst/>
@@ -9720,325 +11203,30 @@
           <a:p/>
         </p:txBody>
       </p:sp>
-      <p:sp>
-        <p:nvSpPr>
-          <p:cNvPr id="8" name="TextBox 7"/>
-          <p:cNvSpPr txBox="1"/>
-          <p:nvPr/>
-        </p:nvSpPr>
-        <p:spPr>
-          <a:xfrm>
-            <a:off x="932688" y="1975104"/>
-            <a:ext cx="3222650" cy="237744"/>
-          </a:xfrm>
-          <a:prstGeom prst="rect">
-            <a:avLst/>
-          </a:prstGeom>
-          <a:noFill/>
-        </p:spPr>
-        <p:txBody>
-          <a:bodyPr wrap="square" lIns="0" rIns="0" tIns="0" bIns="0" anchor="t">
-            <a:spAutoFit/>
-          </a:bodyPr>
-          <a:lstStyle/>
-          <a:p>
-            <a:pPr algn="l">
-              <a:lnSpc>
-                <a:spcPct val="135000"/>
-              </a:lnSpc>
-            </a:pPr>
-            <a:r>
-              <a:rPr sz="1300" b="1" i="0" spc="156">
-                <a:solidFill>
-                  <a:srgbClr val="6E7175"/>
-                </a:solidFill>
-                <a:latin typeface="Verdana"/>
-              </a:rPr>
-              <a:t>CE QUE L'ÉLÈVE DONNE</a:t>
-            </a:r>
-          </a:p>
-        </p:txBody>
-      </p:sp>
-      <p:sp>
-        <p:nvSpPr>
-          <p:cNvPr id="9" name="TextBox 8"/>
-          <p:cNvSpPr txBox="1"/>
-          <p:nvPr/>
-        </p:nvSpPr>
-        <p:spPr>
-          <a:xfrm>
-            <a:off x="4374794" y="1975104"/>
-            <a:ext cx="3222650" cy="237744"/>
-          </a:xfrm>
-          <a:prstGeom prst="rect">
-            <a:avLst/>
-          </a:prstGeom>
-          <a:noFill/>
-        </p:spPr>
-        <p:txBody>
-          <a:bodyPr wrap="square" lIns="0" rIns="0" tIns="0" bIns="0" anchor="t">
-            <a:spAutoFit/>
-          </a:bodyPr>
-          <a:lstStyle/>
-          <a:p>
-            <a:pPr algn="l">
-              <a:lnSpc>
-                <a:spcPct val="135000"/>
-              </a:lnSpc>
-            </a:pPr>
-            <a:r>
-              <a:rPr sz="1300" b="1" i="0" spc="156">
-                <a:solidFill>
-                  <a:srgbClr val="6E7175"/>
-                </a:solidFill>
-                <a:latin typeface="Verdana"/>
-              </a:rPr>
-              <a:t>CE QUE L'ENSEIGNANT VOIT</a:t>
-            </a:r>
-          </a:p>
-        </p:txBody>
-      </p:sp>
-      <p:sp>
-        <p:nvSpPr>
-          <p:cNvPr id="10" name="TextBox 9"/>
-          <p:cNvSpPr txBox="1"/>
-          <p:nvPr/>
-        </p:nvSpPr>
-        <p:spPr>
-          <a:xfrm>
-            <a:off x="7816900" y="1975104"/>
-            <a:ext cx="3222650" cy="237744"/>
-          </a:xfrm>
-          <a:prstGeom prst="rect">
-            <a:avLst/>
-          </a:prstGeom>
-          <a:noFill/>
-        </p:spPr>
-        <p:txBody>
-          <a:bodyPr wrap="square" lIns="0" rIns="0" tIns="0" bIns="0" anchor="t">
-            <a:spAutoFit/>
-          </a:bodyPr>
-          <a:lstStyle/>
-          <a:p>
-            <a:pPr algn="l">
-              <a:lnSpc>
-                <a:spcPct val="135000"/>
-              </a:lnSpc>
-            </a:pPr>
-            <a:r>
-              <a:rPr sz="1300" b="1" i="0" spc="156">
-                <a:solidFill>
-                  <a:srgbClr val="6E7175"/>
-                </a:solidFill>
-                <a:latin typeface="Verdana"/>
-              </a:rPr>
-              <a:t>CE QUI EST GARDÉ</a:t>
-            </a:r>
-          </a:p>
-        </p:txBody>
-      </p:sp>
-      <p:sp>
-        <p:nvSpPr>
-          <p:cNvPr id="11" name="TextBox 10"/>
-          <p:cNvSpPr txBox="1"/>
-          <p:nvPr/>
-        </p:nvSpPr>
-        <p:spPr>
-          <a:xfrm>
-            <a:off x="932688" y="2395728"/>
-            <a:ext cx="3222650" cy="1243584"/>
-          </a:xfrm>
-          <a:prstGeom prst="rect">
-            <a:avLst/>
-          </a:prstGeom>
-          <a:noFill/>
-        </p:spPr>
-        <p:txBody>
-          <a:bodyPr wrap="square" lIns="0" rIns="0" tIns="0" bIns="0" anchor="t">
-            <a:spAutoFit/>
-          </a:bodyPr>
-          <a:lstStyle/>
-          <a:p>
-            <a:pPr algn="l">
-              <a:lnSpc>
-                <a:spcPct val="132000"/>
-              </a:lnSpc>
-            </a:pPr>
-            <a:r>
-              <a:rPr sz="1800" b="0" i="0">
-                <a:solidFill>
-                  <a:srgbClr val="3A3D40"/>
-                </a:solidFill>
-                <a:latin typeface="Verdana"/>
-              </a:rPr>
-              <a:t>Rien : un code à six caractères, scanné sur une feuille photocopiée</a:t>
-            </a:r>
-          </a:p>
-        </p:txBody>
-      </p:sp>
-      <p:sp>
-        <p:nvSpPr>
-          <p:cNvPr id="12" name="TextBox 11"/>
-          <p:cNvSpPr txBox="1"/>
-          <p:nvPr/>
-        </p:nvSpPr>
-        <p:spPr>
-          <a:xfrm>
-            <a:off x="4374794" y="2395728"/>
-            <a:ext cx="3222650" cy="1243584"/>
-          </a:xfrm>
-          <a:prstGeom prst="rect">
-            <a:avLst/>
-          </a:prstGeom>
-          <a:noFill/>
-        </p:spPr>
-        <p:txBody>
-          <a:bodyPr wrap="square" lIns="0" rIns="0" tIns="0" bIns="0" anchor="t">
-            <a:spAutoFit/>
-          </a:bodyPr>
-          <a:lstStyle/>
-          <a:p>
-            <a:pPr algn="l">
-              <a:lnSpc>
-                <a:spcPct val="132000"/>
-              </a:lnSpc>
-            </a:pPr>
-            <a:r>
-              <a:rPr sz="1800" b="0" i="0">
-                <a:solidFill>
-                  <a:srgbClr val="3A3D40"/>
-                </a:solidFill>
-                <a:latin typeface="Verdana"/>
-              </a:rPr>
-              <a:t>Son tableau de classe, participant par participant, question par question</a:t>
-            </a:r>
-          </a:p>
-        </p:txBody>
-      </p:sp>
-      <p:sp>
-        <p:nvSpPr>
-          <p:cNvPr id="13" name="TextBox 12"/>
-          <p:cNvSpPr txBox="1"/>
-          <p:nvPr/>
-        </p:nvSpPr>
-        <p:spPr>
-          <a:xfrm>
-            <a:off x="7816900" y="2395728"/>
-            <a:ext cx="3222650" cy="1243584"/>
-          </a:xfrm>
-          <a:prstGeom prst="rect">
-            <a:avLst/>
-          </a:prstGeom>
-          <a:noFill/>
-        </p:spPr>
-        <p:txBody>
-          <a:bodyPr wrap="square" lIns="0" rIns="0" tIns="0" bIns="0" anchor="t">
-            <a:spAutoFit/>
-          </a:bodyPr>
-          <a:lstStyle/>
-          <a:p>
-            <a:pPr algn="l">
-              <a:lnSpc>
-                <a:spcPct val="132000"/>
-              </a:lnSpc>
-            </a:pPr>
-            <a:r>
-              <a:rPr sz="1800" b="0" i="0">
-                <a:solidFill>
-                  <a:srgbClr val="3A3D40"/>
-                </a:solidFill>
-                <a:latin typeface="Verdana"/>
-              </a:rPr>
-              <a:t>Aucun nom, aucun pseudonyme, aucune voix ; une séance qui expire le soir</a:t>
-            </a:r>
-          </a:p>
-        </p:txBody>
-      </p:sp>
-      <p:sp>
-        <p:nvSpPr>
-          <p:cNvPr id="14" name="Rounded Rectangle 13"/>
-          <p:cNvSpPr/>
-          <p:nvPr/>
-        </p:nvSpPr>
-        <p:spPr>
-          <a:xfrm>
-            <a:off x="566928" y="4133087"/>
-            <a:ext cx="11057839" cy="1175004"/>
-          </a:xfrm>
-          <a:prstGeom prst="roundRect">
-            <a:avLst>
-              <a:gd name="adj" fmla="val 12451"/>
-            </a:avLst>
-          </a:prstGeom>
-          <a:solidFill>
-            <a:srgbClr val="FBFBFA"/>
-          </a:solidFill>
-          <a:ln w="12700">
-            <a:solidFill>
-              <a:srgbClr val="EAEAE8"/>
-            </a:solidFill>
-          </a:ln>
-          <a:effectLst/>
-        </p:spPr>
-        <p:style>
-          <a:lnRef idx="1">
-            <a:schemeClr val="accent1"/>
-          </a:lnRef>
-          <a:fillRef idx="3">
-            <a:schemeClr val="accent1"/>
-          </a:fillRef>
-          <a:effectRef idx="2">
-            <a:schemeClr val="accent1"/>
-          </a:effectRef>
-          <a:fontRef idx="minor">
-            <a:schemeClr val="lt1"/>
-          </a:fontRef>
-        </p:style>
-        <p:txBody>
-          <a:bodyPr rtlCol="0" anchor="ctr"/>
-          <a:lstStyle/>
-          <a:p/>
-        </p:txBody>
-      </p:sp>
-      <p:sp>
-        <p:nvSpPr>
-          <p:cNvPr id="15" name="TextBox 14"/>
-          <p:cNvSpPr txBox="1"/>
-          <p:nvPr/>
-        </p:nvSpPr>
-        <p:spPr>
-          <a:xfrm>
-            <a:off x="969264" y="4389120"/>
-            <a:ext cx="10234879" cy="717804"/>
-          </a:xfrm>
-          <a:prstGeom prst="rect">
-            <a:avLst/>
-          </a:prstGeom>
-          <a:noFill/>
-        </p:spPr>
-        <p:txBody>
-          <a:bodyPr wrap="square" lIns="0" rIns="0" tIns="0" bIns="0" anchor="t">
-            <a:spAutoFit/>
-          </a:bodyPr>
-          <a:lstStyle/>
-          <a:p>
-            <a:pPr algn="l">
-              <a:lnSpc>
-                <a:spcPct val="145000"/>
-              </a:lnSpc>
-            </a:pPr>
-            <a:r>
-              <a:rPr sz="1800" b="0" i="0">
-                <a:solidFill>
-                  <a:srgbClr val="4B4F52"/>
-                </a:solidFill>
-                <a:latin typeface="Verdana"/>
-              </a:rPr>
-              <a:t>La direction autorise le mode ; l'enseignant décide de s'en servir un mardi matin. Les deux gestes sont distincts.</a:t>
-            </a:r>
-          </a:p>
-        </p:txBody>
-      </p:sp>
+      <p:pic>
+        <p:nvPicPr>
+          <p:cNvPr id="9" name="Picture 8" descr="cas-09-production-avec-ia.png"/>
+          <p:cNvPicPr>
+            <a:picLocks noChangeAspect="1"/>
+          </p:cNvPicPr>
+          <p:nvPr/>
+        </p:nvPicPr>
+        <p:blipFill>
+          <a:blip r:embed="rId2"/>
+          <a:stretch>
+            <a:fillRect/>
+          </a:stretch>
+        </p:blipFill>
+        <p:spPr>
+          <a:xfrm>
+            <a:off x="5343296" y="2391156"/>
+            <a:ext cx="1505102" cy="3762756"/>
+          </a:xfrm>
+          <a:prstGeom prst="rect">
+            <a:avLst/>
+          </a:prstGeom>
+        </p:spPr>
+      </p:pic>
     </p:spTree>
   </p:cSld>
   <p:clrMapOvr>
